--- a/플랫폼_독점_발표_수정본.pptx
+++ b/플랫폼_독점_발표_수정본.pptx
@@ -121,26 +121,26 @@
   <p:extLst>
     <p:ext uri="{521415D9-36F7-43E2-AB2F-B90AF26B5E84}">
       <p14:sectionLst xmlns:p14="http://schemas.microsoft.com/office/powerpoint/2010/main">
-        <p14:section name="도입" id="{28a4d2f7-b774-6148-a79b-884c963910de}">
+        <p14:section name="도입" id="{a0547799-816d-e7d4-18af-c6a42b83884a}">
           <p14:sldIdLst>
             <p14:sldId id="256"/>
             <p14:sldId id="257"/>
           </p14:sldIdLst>
         </p14:section>
-        <p14:section name="플랫폼 이해" id="{ee4bdb73-8642-660e-c280-64fe7be7f18a}">
+        <p14:section name="플랫폼 이해" id="{7b014b9d-219e-966c-9e78-e726c007618e}">
           <p14:sldIdLst>
             <p14:sldId id="258"/>
             <p14:sldId id="259"/>
           </p14:sldIdLst>
         </p14:section>
-        <p14:section name="배달의 돈 흐름" id="{b8f4720b-7b42-1c84-118a-a87a87abf681}">
+        <p14:section name="배달의 돈 흐름" id="{9fcb690d-2734-9f12-517c-a8f98c07fccc}">
           <p14:sldIdLst>
             <p14:sldId id="260"/>
             <p14:sldId id="261"/>
             <p14:sldId id="262"/>
           </p14:sldIdLst>
         </p14:section>
-        <p14:section name="독과점 사례" id="{ed89d5c0-9a7d-1e50-dcde-4fc980296d96}">
+        <p14:section name="독과점 사례" id="{1390e3e3-308f-6cb5-0cd7-3c52cbc49b8a}">
           <p14:sldIdLst>
             <p14:sldId id="263"/>
             <p14:sldId id="264"/>
@@ -148,7 +148,7 @@
             <p14:sldId id="266"/>
           </p14:sldIdLst>
         </p14:section>
-        <p14:section name="정리와 대응" id="{ff222c53-8f9e-9cec-51b9-2f29a46eceb4}">
+        <p14:section name="정리와 대응" id="{b050beb3-5d64-e4bb-8b74-46980ffb49bb}">
           <p14:sldIdLst>
             <p14:sldId id="267"/>
             <p14:sldId id="268"/>
@@ -560,8 +560,8 @@
           <a:p>
             <a:r>
               <a:rPr lang="en-US" dirty="0"/>
-              <a:t>표지는 짧게 넘기기 (다음 장과 합쳐 약 40초).
-대괄호 부분 [과목명], [○조], [발표자 이름], [발표일]은 실제 정보로 바꿔서 쓰기.</a:t>
+              <a:t>표지는 바로 넘기기. 다음 장과 합쳐서 40초 정도.
+대괄호 부분은 실제 과목명, 조, 이름, 날짜로 바꾸기.</a:t>
             </a:r>
             <a:endParaRPr lang="en-US" dirty="0"/>
           </a:p>
@@ -649,11 +649,11 @@
           <a:p>
             <a:r>
               <a:rPr lang="en-US" dirty="0"/>
-              <a:t>(약 60초)
-- 마지막 판단일은 2024.9.10., 자료를 확인한 날은 2026.10.1.
-- 유럽위원회 과징금은 €2,424,495,000(약 24.2억 유로).
-- 일반법원은 일반검색 시장 효과에 관한 부분만 일부 취소했고, 비교쇼핑 판단과 과징금은 유지함.
-- '모든 자사우대는 위법'으로 넓혀서 말하지 않기. 다른 구글 사건까지 확정됐다고 일반화하지 않기.</a:t>
+              <a:t>1분 정도.
+유럽위원회 과징금은 €2,424,495,000(약 24.2억 유로).
+일반법원은 일반검색 시장 효과에 관한 부분은 일부 취소했지만, 비교쇼핑 판단과 과징금은 유지함.
+이 사건에 대한 판단임. 모든 자사우대가 자동으로 위법이라는 뜻은 아니고, 다른 구글 사건까지 확정된 것도 아님.
+판결문 전문이 아니라 사법재판소 공식 보도자료를 기준으로 정리함.</a:t>
             </a:r>
             <a:endParaRPr lang="en-US" dirty="0"/>
           </a:p>
@@ -741,9 +741,12 @@
           <a:p>
             <a:r>
               <a:rPr lang="en-US" dirty="0"/>
-              <a:t>(약 30초)
-세 사례를 한 문장씩 되짚기.
-제재 발표, 행정 의결, 법원 판단, 확정 여부를 구분해서 말하면 과장 없이 상태를 전달할 수 있음.</a:t>
+              <a:t>30초 정도.
+세 사례가 같은 '독점'이 아니라 걸린 단계가 다르다는 점이 핵심.
+배민-요기요: 결합으로 시장구조가 바뀌기 전에 심사(1단계).
+구글 쇼핑: 검색 시장의 지배적 지위(2단계)와 그 지위를 이용한 자사우대(3단계)가 모두 인정됨.
+쿠팡: 지배적 지위가 아니라 '부당한 고객유인'이라는 행위(3단계)로 제재됨.
+이 배치는 4번 틀에 맞춰 우리 조가 정리한 것.</a:t>
             </a:r>
             <a:endParaRPr lang="en-US" dirty="0"/>
           </a:p>
@@ -831,11 +834,11 @@
           <a:p>
             <a:r>
               <a:rPr lang="en-US" dirty="0"/>
-              <a:t>(약 35초)
+              <a:t>35초 정도.
 네 줄을 다 읽지 말고 두 줄 정도만 골라서 설명.
-- 문제를 '플랫폼이 돈을 번다'로 좁히지 말고, 같은 구조가 편익과 위험을 함께 만든다는 점을 보여 주기.
-- '교섭력 차이'는 거래 조건이 바뀔 때 입점업체·라이더가 협상할 힘이 상대적으로 약할 수 있다는 뜻.
-- 실제 사례와 연결할 때는 행위와 효과를 따로 확인해야 함.</a:t>
+'플랫폼이 돈을 번다'가 문제가 아니라, 같은 구조가 편익과 위험을 함께 만든다는 점이 포인트.
+'교섭력 차이'는 거래 조건이 바뀔 때 입점업체나 라이더가 협상할 힘이 상대적으로 약할 수 있다는 뜻.
+일반적으로 이렇게 작동할 수 있다는 정리라서, 특정 기업이 전부 해당한다는 뜻은 아님.</a:t>
             </a:r>
             <a:endParaRPr lang="en-US" dirty="0"/>
           </a:p>
@@ -923,10 +926,9 @@
           <a:p>
             <a:r>
               <a:rPr lang="en-US" dirty="0"/>
-              <a:t>(약 35초)
-두 대응은 앞의 사례와 배달 정산에 각각 연결됨.
-둘 다 효과가 입증된 정책이 아니라 조사를 바탕으로 따져 볼 방향이라서, 기대효과와 한계를 같이 말하기.
-시간이 남으면 덧붙일 수 있는 방향: 다른 플랫폼으로 옮기기 어렵게 만드는 제약 점검, 라이더 보수와 계약조건의 설명·협의.</a:t>
+              <a:t>35초 정도.
+둘 다 효과가 입증된 정책이라기보다 따져 볼 방향이라서, 기대효과와 한계를 같이 말하기.
+시간이 남으면: 다른 플랫폼으로 옮기기 어렵게 만드는 제약 점검, 라이더 보수와 계약조건의 설명·협의도 검토할 수 있는 방향.</a:t>
             </a:r>
             <a:endParaRPr lang="en-US" dirty="0"/>
           </a:p>
@@ -1014,9 +1016,9 @@
           <a:p>
             <a:r>
               <a:rPr lang="en-US" dirty="0"/>
-              <a:t>(약 50초)
-결론 문장 → 점검 질문 두 개 → 마무리 질문 순서로 말하기.
-조에서 결론을 다르게 정하면, 새 사실을 추가하지 말고 문장만 바꿔서 쓰기.</a:t>
+              <a:t>50초 정도.
+결론 문장 → 점검 질문 두 개 → 마무리 질문 순서.
+조에서 결론을 다르게 정하면 새 사실은 넣지 말고 문장만 바꾸기.</a:t>
             </a:r>
             <a:endParaRPr lang="en-US" dirty="0"/>
           </a:p>
@@ -1104,7 +1106,7 @@
           <a:p>
             <a:r>
               <a:rPr lang="en-US" dirty="0"/>
-              <a:t>남은 시간(약 20초)은 여유로 두기.</a:t>
+              <a:t>남은 시간은 여유로 두기.</a:t>
             </a:r>
             <a:endParaRPr lang="en-US" dirty="0"/>
           </a:p>
@@ -1192,9 +1194,8 @@
           <a:p>
             <a:r>
               <a:rPr lang="en-US" dirty="0"/>
-              <a:t>(표지 포함 약 40초)
-질문만 던지고 답은 7번 슬라이드(정산 예시)에서 공개.
-'식당이 받는 돈과 실제 이익은 다르다'는 정도만 미리 궁금하게 만들면 충분함.</a:t>
+              <a:t>질문만 던지고 넘어가기. 답은 7번 정산 예시에서 공개.
+'식당이 받는 돈'과 '식당이 버는 돈'이 다르다는 점만 궁금하게 만들면 됨.</a:t>
             </a:r>
             <a:endParaRPr lang="en-US" dirty="0"/>
           </a:p>
@@ -1282,12 +1283,10 @@
           <a:p>
             <a:r>
               <a:rPr lang="en-US" dirty="0"/>
-              <a:t>(약 35초)
-정의는 한 번 읽고, 표는 '거래형'과 '혁신형' 차이만 짚기.
-- OECD가 소개한 기능 기준의 설명 틀이고, 실제 기능은 겹칠 수 있어서 이 분류만으로 정책 문제를 다 설명하긴 어려움.
-- 수익 모델(수수료, 광고, 구독, 결제·물류 대가, 직접 판매 차익)은 유형과 별개로 봐야 함.
-- 예시는 기능 설명일 뿐, 특정 회사를 한 유형으로 못 박은 게 아님.
-출처: OECD(2019) 4장.</a:t>
+              <a:t>35초 정도.
+정의는 한 번 읽고, 표는 거래형과 혁신형 차이만 짚기.
+수익 모델(수수료, 광고, 구독, 결제·물류 대가, 직접 판매 차익)은 유형과 따로 봐야 함. 표의 예시도 기능을 설명하려는 것이지, 특정 회사를 한 유형으로 정하는 건 아님.
+참고: OECD(2019) 보고서 4장.</a:t>
             </a:r>
             <a:endParaRPr lang="en-US" dirty="0"/>
           </a:p>
@@ -1375,10 +1374,9 @@
           <a:p>
             <a:r>
               <a:rPr lang="en-US" dirty="0"/>
-              <a:t>(약 35초)
-시장집중, 시장지배력, 지배력 남용은 서로 다른 개념이라는 점만 확실히 전달.
-- 이건 발표용으로 정리한 틀이고, 법률상 요건은 사건마다 다름.
-- 예: 뒤에 나오는 쿠팡 사건은 '부당한 고객유인행위'로 제재받은 것이라, 시장지배적 지위 남용으로 확정된 사건처럼 말하면 안 됨.</a:t>
+              <a:t>35초 정도.
+시장집중, 시장지배력, 지배력 남용이 서로 다른 개념이라는 것만 전달하면 됨.
+이 틀은 우리 조가 발표용으로 정리한 것이고, 법적인 요건은 사건마다 다름. 11번에서 세 사례를 이 틀에 다시 대입함.</a:t>
             </a:r>
             <a:endParaRPr lang="en-US" dirty="0"/>
           </a:p>
@@ -1466,11 +1464,11 @@
           <a:p>
             <a:r>
               <a:rPr lang="en-US" dirty="0"/>
-              <a:t>(약 40초)
-그림은 돈이 어떤 항목으로 나뉘는지 보여 주는 개념도이고, 모든 돈이 한 회사 매출이 된다는 뜻은 아님.
-- 한 주문에 다섯 주체가 다 들어가는 건 아님. 음식 주문이면 식당, 장보기 주문이면 입점 마트가 판매자 자리에 들어감.
-- 식당 정산액은 순이익이 아니고, 배민이 공제한 돈도 그대로 순이익이 아님(라이더 보수·결제 처리·운영비가 나감).
-- 라이더의 실제 순소득은 공개된 요금만으로는 계산 불가. 2025년 회사 발표의 보수 개편 내용과 지금 실제 수입은 다를 수 있음.</a:t>
+              <a:t>40초 정도.
+위 줄은 돈이 오가는 흐름, 아래 줄은 배달이 이뤄지는 흐름. 모든 돈이 한 회사 매출이 된다는 그림은 아님.
+식당 정산액도, 배민이 공제한 돈도 그대로 순이익은 아님. 배민 쪽도 라이더 보수, 결제 처리, 운영비가 나감.
+라이더 실제 순소득은 공개된 요금만으로는 계산할 수 없음. 2025년 회사 발표의 보수 개편 내용과 지금 실제 수입은 다를 수 있음.
+계약·지급 주체는 서비스마다 다름.</a:t>
             </a:r>
             <a:endParaRPr lang="en-US" dirty="0"/>
           </a:p>
@@ -1558,12 +1556,12 @@
           <a:p>
             <a:r>
               <a:rPr lang="en-US" dirty="0"/>
-              <a:t>(약 40초)
-칸을 다 읽지 말고 '중개(수수료)'와 '직접 판매(매입)'의 차이, 그리고 배달팁이 누구 매출로 잡히는지만 짚기.
-- 가게배달 중개이용료 6.8%는 부가세 별도이고, 배송은 점주가 직접 하거나 대행을 씀.
-- 배민배달·가게배달·장보기는 배민 공식 안내로 확인한 내용. B마트 직매입 설명(사들여 보관·피킹·배송)은 전자신문 기사(2026.7.) 기준이고, 공식 소개 페이지 본문은 확인하지 못함.
-- 배달팁 귀속(배민배달은 배민 매출, 가게배달은 점주 매출)은 배민 부가세 신고자료 안내 기준.
-- 배민스토어 안내를 모든 장보기 주문에 확대해서 말하지 않기. B마트의 상품별 계약과 이익률은 확인하지 않았음.</a:t>
+              <a:t>40초 정도.
+칸을 다 읽을 필요 없음. 중개(수수료)와 직접 판매(매입)의 차이, 배달팁이 누구 매출로 잡히는지만 짚기.
+가게배달 중개이용료 6.8%는 부가세 별도. 배송은 점주가 직접 하거나 대행을 씀.
+배민배달·가게배달·장보기는 배민 공식 안내로 확인. B마트 직매입 설명은 전자신문 기사(2026.7.) 기준이고, 공식 소개 페이지 본문은 확인 못 함. B마트의 상품별 계약이나 이익률도 확인하지 않았음.
+배달팁 귀속은 배민 부가세 신고자료 안내 기준.
+입점형 장보기와 B마트 칸의 배달팁 줄은 '음식배달과 같은 방식으로 계산할 수 없다'는 뜻.</a:t>
             </a:r>
             <a:endParaRPr lang="en-US" dirty="0"/>
           </a:p>
@@ -1651,15 +1649,16 @@
           <a:p>
             <a:r>
               <a:rPr lang="en-US" dirty="0"/>
-              <a:t>(약 60초)
+              <a:t>1분 정도. 2번에서 던진 질문의 답.
 계산 순서:
-- 중개이용료 20,000 × 7.8% = 1,560
-- 결제정산수수료 20,000 × 3% = 600
-- 업주 배달비 3,400 (서울 예시)
-- 부가세 (1,560 + 600 + 3,400) × 10% = 556
-- 총 공제 6,116, 식당 정산액 13,884
+중개이용료 20,000 × 7.8% = 1,560
+결제정산수수료 20,000 × 3% = 600
+업주 배달비 3,400 (서울 예시)
+부가세 (1,560 + 600 + 3,400) × 10% = 556
+빠지는 돈 합계 6,116 (30.58%), 식당 정산액 13,884
+30.58%는 중개이용료, 결제수수료, 배달비, 부가세를 다 합친 비율이라 '수수료율'과는 다름.
 원 자료의 '업주수익'은 순이익으로 오해할 수 있어서 '정산액'으로 바꿔 씀.
-결제수수료 3%는 비교자료의 가정이고, 모든 점주의 현재 요율로 확인한 것은 아님.</a:t>
+결제수수료 3%는 비교자료의 가정이고, 모든 점주에게 지금 적용되는 요율로 확인한 것은 아님.</a:t>
             </a:r>
             <a:endParaRPr lang="en-US" dirty="0"/>
           </a:p>
@@ -1747,11 +1746,12 @@
           <a:p>
             <a:r>
               <a:rPr lang="en-US" dirty="0"/>
-              <a:t>(약 60초)
-문제 구조 20초 → 누가 영향을 받는지 15초 → 진행 과정 20초 → 다음 사례로 넘어가기 5초.
-- 불법행위로 처벌받은 사건처럼 말하지 않기. 결합 전에 하는 예방적 심사였음.
-- 당시 점유율을 말할 거면 2019년 거래금액 기준이라고 밝히고, 지금 점유율처럼 말하지 않기.
-- 매각 완료는 회사(딜리버리히어로) 발표로 확인한 내용.</a:t>
+              <a:t>1분 정도.
+문제 구조 → 영향 → 진행 과정 순서로 말하고 다음 사례로.
+결합 전에 하는 예방적 심사였음. 불법행위로 처벌받은 사건처럼 말하면 틀림.
+법적으로는 '합병'이 아니라 주식 인수 방식의 기업결합.
+당시 점유율을 말할 거면 2019년 거래금액 기준이라고 밝히기. 지금 점유율이 아님.
+매각 완료는 딜리버리히어로 발표로 확인한 내용.</a:t>
             </a:r>
             <a:endParaRPr lang="en-US" dirty="0"/>
           </a:p>
@@ -1839,12 +1839,11 @@
           <a:p>
             <a:r>
               <a:rPr lang="en-US" dirty="0"/>
-              <a:t>(약 60초)
-- 공정위가 문제 삼은 건 '부당한 고객유인행위'임. 시장지배적 지위 남용으로 확정된 사건으로 분류하지 않기.
-- 처음 발표 때 거론된 잠정 과징금과 최종 의결액(1,628억 2,400만 원)을 섞어서 말하지 않기.
-- 시정명령 집행정지에 대한 판단은 본안 판결과 별개.
-- 소송 상태는 발표 직전에 한 번 더 확인하기. 확인 못 하면 "확인한 2026년 2분기 공시 기준으로는 소송 진행 중"이라고 범위를 밝히기.
-- 법적 쟁점은 공정위 의결, 소송 상태는 회사 공시가 출처라는 차이도 같이 말하기.</a:t>
+              <a:t>1분 정도.
+공정위가 적용한 건 '부당한 고객유인행위'. 시장지배적 지위 남용으로 확정된 사건이 아님.
+처음 발표(2024.6.) 때 나온 잠정 과징금과 최종 의결액(1,628억 2,400만 원)은 다름.
+소송 상태: 2분기 공시에는 '2026년 9월 심리 예정'으로 적혀 있었음. 9월 이후 기사 검색에서도 본안 판결 소식은 못 찾음. 발표 직전에 한 번 더 확인하고, 확인 못 하면 '2분기 공시 기준 소송 중'이라고 말하기.
+참고(보도 기준, 원문 미확인): 법원이 시정명령 효력은 멈췄지만 과징금 집행정지는 기각했다는 보도가 있음. 집행정지는 본안 판결과 별개.</a:t>
             </a:r>
             <a:endParaRPr lang="en-US" dirty="0"/>
           </a:p>
@@ -2554,7 +2553,7 @@
                   <a:schemeClr val="bg1"/>
                 </a:solidFill>
               </a:rPr>
-              <a:t>배달앱 2만 원 주문부터 구글 쇼핑 사건까지</a:t>
+              <a:t>배달앱 정산 구조와 세 가지 사례</a:t>
             </a:r>
             <a:endParaRPr lang="en-US" sz="2200" dirty="0"/>
           </a:p>
@@ -2929,7 +2928,7 @@
         <p:spPr>
           <a:xfrm>
             <a:off x="6345936" y="1984248"/>
-            <a:ext cx="0" cy="2048256"/>
+            <a:ext cx="0" cy="1920240"/>
           </a:xfrm>
           <a:prstGeom prst="line">
             <a:avLst/>
@@ -3016,7 +3015,7 @@
         <p:spPr>
           <a:xfrm>
             <a:off x="6629400" y="2148840"/>
-            <a:ext cx="5013655" cy="704088"/>
+            <a:ext cx="5013655" cy="640080"/>
           </a:xfrm>
           <a:prstGeom prst="rect">
             <a:avLst/>
@@ -3040,7 +3039,7 @@
                   <a:schemeClr val="tx1"/>
                 </a:solidFill>
               </a:rPr>
-              <a:t>유럽위원회 결정, 과징금 약 24.2억 유로</a:t>
+              <a:t>유럽위원회, 과징금 약 24.2억 유로 부과</a:t>
             </a:r>
             <a:endParaRPr lang="en-US" sz="1400" dirty="0"/>
           </a:p>
@@ -3054,7 +3053,7 @@
         </p:nvSpPr>
         <p:spPr>
           <a:xfrm>
-            <a:off x="6263640" y="2926080"/>
+            <a:off x="6263640" y="2862072"/>
             <a:ext cx="164592" cy="164592"/>
           </a:xfrm>
           <a:prstGeom prst="ellipse">
@@ -3079,7 +3078,7 @@
         </p:nvSpPr>
         <p:spPr>
           <a:xfrm>
-            <a:off x="6629400" y="2862072"/>
+            <a:off x="6629400" y="2798064"/>
             <a:ext cx="5013655" cy="292608"/>
           </a:xfrm>
           <a:prstGeom prst="rect">
@@ -3118,8 +3117,8 @@
         </p:nvSpPr>
         <p:spPr>
           <a:xfrm>
-            <a:off x="6629400" y="3172968"/>
-            <a:ext cx="5013655" cy="704088"/>
+            <a:off x="6629400" y="3108960"/>
+            <a:ext cx="5013655" cy="640080"/>
           </a:xfrm>
           <a:prstGeom prst="rect">
             <a:avLst/>
@@ -3143,7 +3142,7 @@
                   <a:schemeClr val="tx1"/>
                 </a:solidFill>
               </a:rPr>
-              <a:t>EU 일반법원, 비교쇼핑 관련 판단과 과징금 유지 (일반검색 시장 효과 부분은 일부 취소)</a:t>
+              <a:t>EU 일반법원, 비교쇼핑 관련 판단과 과징금 유지</a:t>
             </a:r>
             <a:endParaRPr lang="en-US" sz="1400" dirty="0"/>
           </a:p>
@@ -3157,7 +3156,7 @@
         </p:nvSpPr>
         <p:spPr>
           <a:xfrm>
-            <a:off x="6263640" y="3950208"/>
+            <a:off x="6263640" y="3822192"/>
             <a:ext cx="164592" cy="164592"/>
           </a:xfrm>
           <a:prstGeom prst="ellipse">
@@ -3182,7 +3181,7 @@
         </p:nvSpPr>
         <p:spPr>
           <a:xfrm>
-            <a:off x="6629400" y="3886200"/>
+            <a:off x="6629400" y="3758184"/>
             <a:ext cx="5013655" cy="292608"/>
           </a:xfrm>
           <a:prstGeom prst="rect">
@@ -3221,8 +3220,8 @@
         </p:nvSpPr>
         <p:spPr>
           <a:xfrm>
-            <a:off x="6629400" y="4197096"/>
-            <a:ext cx="5013655" cy="704088"/>
+            <a:off x="6629400" y="4069080"/>
+            <a:ext cx="5013655" cy="640080"/>
           </a:xfrm>
           <a:prstGeom prst="rect">
             <a:avLst/>
@@ -3246,7 +3245,7 @@
                   <a:schemeClr val="tx1"/>
                 </a:solidFill>
               </a:rPr>
-              <a:t>EU 사법재판소(C-48/22 P), 구글·알파벳 항소 기각</a:t>
+              <a:t>EU 사법재판소, 구글 항소 기각</a:t>
             </a:r>
             <a:endParaRPr lang="en-US" sz="1400" dirty="0"/>
           </a:p>
@@ -3319,7 +3318,7 @@
                   <a:schemeClr val="tx1"/>
                 </a:solidFill>
               </a:rPr>
-              <a:t>이 사건의 자사우대는 문제로 인정됐지만, 모든 자사우대가 자동으로 위법이라는 뜻은 아님</a:t>
+              <a:t>지배적 검색 사업자의 자사우대가 최종심에서 위법으로 확정된 사례</a:t>
             </a:r>
             <a:endParaRPr lang="en-US" sz="1700" dirty="0"/>
           </a:p>
@@ -3358,7 +3357,7 @@
                   <a:schemeClr val="accent5"/>
                 </a:solidFill>
               </a:rPr>
-              <a:t>출처: EU 사법재판소 보도자료 No 135/24(2024.9.10.)  |  판결문 전문이 아닌 공식 보도자료 기준</a:t>
+              <a:t>출처: EU 사법재판소 보도자료(2024.9.10.)</a:t>
             </a:r>
             <a:endParaRPr lang="en-US" sz="1000" dirty="0"/>
           </a:p>
@@ -3466,7 +3465,7 @@
                   <a:schemeClr val="tx1"/>
                 </a:solidFill>
               </a:rPr>
-              <a:t>세 사례 비교</a:t>
+              <a:t>세 사례 비교: 어느 단계의 문제였나</a:t>
             </a:r>
             <a:endParaRPr lang="en-US" sz="2800" dirty="0"/>
           </a:p>
@@ -3487,7 +3486,7 @@
           </p:nvPr>
         </p:nvGraphicFramePr>
         <p:xfrm>
-          <a:off x="548640" y="1463040"/>
+          <a:off x="548640" y="1417320"/>
           <a:ext cx="11094415" cy="914400"/>
         </p:xfrm>
         <a:graphic>
@@ -3684,7 +3683,7 @@
                   </a:tcPr>
                 </a:tc>
               </a:tr>
-              <a:tr h="731520">
+              <a:tr h="621792">
                 <a:tc>
                   <a:txBody>
                     <a:bodyPr/>
@@ -3860,7 +3859,7 @@
                   </a:tcPr>
                 </a:tc>
               </a:tr>
-              <a:tr h="822960">
+              <a:tr h="621792">
                 <a:tc>
                   <a:txBody>
                     <a:bodyPr/>
@@ -3995,20 +3994,6 @@
                       </a:r>
                       <a:endParaRPr lang="en-US" sz="1600" dirty="0"/>
                     </a:p>
-                    <a:p>
-                      <a:pPr indent="0" marL="0">
-                        <a:buNone/>
-                      </a:pPr>
-                      <a:r>
-                        <a:rPr lang="en-US" sz="1600" dirty="0">
-                          <a:solidFill>
-                            <a:schemeClr val="tx1"/>
-                          </a:solidFill>
-                        </a:rPr>
-                        <a:t>(2026년 2분기 공시 기준)</a:t>
-                      </a:r>
-                      <a:endParaRPr lang="en-US" sz="1600" dirty="0"/>
-                    </a:p>
                   </a:txBody>
                   <a:tcPr marL="164592" marR="164592" marT="54864" marB="54864" anchor="ctr">
                     <a:lnL w="9525" cap="flat" cmpd="sng" algn="ctr">
@@ -4050,7 +4035,7 @@
                   </a:tcPr>
                 </a:tc>
               </a:tr>
-              <a:tr h="731520">
+              <a:tr h="621792">
                 <a:tc>
                   <a:txBody>
                     <a:bodyPr/>
@@ -4181,7 +4166,7 @@
                             <a:schemeClr val="tx1"/>
                           </a:solidFill>
                         </a:rPr>
-                        <a:t>EU 사법재판소 항소 기각 (2024)</a:t>
+                        <a:t>최종심에서 결정 유지 (2024)</a:t>
                       </a:r>
                       <a:endParaRPr lang="en-US" sz="1600" dirty="0"/>
                     </a:p>
@@ -4232,16 +4217,55 @@
       </p:graphicFrame>
       <p:sp>
         <p:nvSpPr>
-          <p:cNvPr id="4" name="Shape 1"/>
+          <p:cNvPr id="4" name="Text 1"/>
+          <p:cNvSpPr txBox="1"/>
+          <p:nvPr/>
+        </p:nvSpPr>
+        <p:spPr>
+          <a:xfrm>
+            <a:off x="548640" y="4023360"/>
+            <a:ext cx="7315200" cy="320040"/>
+          </a:xfrm>
+          <a:prstGeom prst="rect">
+            <a:avLst/>
+          </a:prstGeom>
+          <a:noFill/>
+          <a:ln/>
+        </p:spPr>
+        <p:txBody>
+          <a:bodyPr wrap="square" lIns="0" tIns="0" rIns="0" bIns="0" rtlCol="0" anchor="t"/>
+          <a:lstStyle/>
+          <a:p>
+            <a:pPr indent="0" marL="0">
+              <a:lnSpc>
+                <a:spcPct val="110000"/>
+              </a:lnSpc>
+              <a:buNone/>
+            </a:pPr>
+            <a:r>
+              <a:rPr lang="en-US" sz="1500" b="1" dirty="0">
+                <a:solidFill>
+                  <a:schemeClr val="accent5"/>
+                </a:solidFill>
+              </a:rPr>
+              <a:t>4번의 세 단계로 나눠 보면</a:t>
+            </a:r>
+            <a:endParaRPr lang="en-US" sz="1500" dirty="0"/>
+          </a:p>
+        </p:txBody>
+      </p:sp>
+      <p:sp>
+        <p:nvSpPr>
+          <p:cNvPr id="5" name="Text 2"/>
           <p:cNvSpPr/>
           <p:nvPr/>
         </p:nvSpPr>
         <p:spPr>
           <a:xfrm>
-            <a:off x="548640" y="4617720"/>
-            <a:ext cx="11094415" cy="1097280"/>
-          </a:xfrm>
-          <a:prstGeom prst="rect">
+            <a:off x="548640" y="4434840"/>
+            <a:ext cx="3776472" cy="594360"/>
+          </a:xfrm>
+          <a:prstGeom prst="homePlate">
             <a:avLst/>
           </a:prstGeom>
           <a:solidFill>
@@ -4249,66 +4273,221 @@
           </a:solidFill>
           <a:ln/>
         </p:spPr>
-      </p:sp>
-      <p:sp>
-        <p:nvSpPr>
-          <p:cNvPr id="5" name="Text 2"/>
+        <p:txBody>
+          <a:bodyPr wrap="square" lIns="0" tIns="0" rIns="0" bIns="0" rtlCol="0" anchor="ctr"/>
+          <a:lstStyle/>
+          <a:p>
+            <a:pPr algn="ctr" indent="0" marL="0">
+              <a:buNone/>
+            </a:pPr>
+            <a:r>
+              <a:rPr lang="en-US" sz="1600" b="1" dirty="0">
+                <a:solidFill>
+                  <a:schemeClr val="tx1"/>
+                </a:solidFill>
+              </a:rPr>
+              <a:t>1  시장구조</a:t>
+            </a:r>
+            <a:endParaRPr lang="en-US" sz="1600" dirty="0"/>
+          </a:p>
+        </p:txBody>
+      </p:sp>
+      <p:sp>
+        <p:nvSpPr>
+          <p:cNvPr id="6" name="Text 3"/>
+          <p:cNvSpPr/>
+          <p:nvPr/>
+        </p:nvSpPr>
+        <p:spPr>
+          <a:xfrm>
+            <a:off x="4206240" y="4434840"/>
+            <a:ext cx="3776472" cy="594360"/>
+          </a:xfrm>
+          <a:prstGeom prst="chevron">
+            <a:avLst/>
+          </a:prstGeom>
+          <a:solidFill>
+            <a:schemeClr val="accent3"/>
+          </a:solidFill>
+          <a:ln/>
+        </p:spPr>
+        <p:txBody>
+          <a:bodyPr wrap="square" lIns="0" tIns="0" rIns="0" bIns="0" rtlCol="0" anchor="ctr"/>
+          <a:lstStyle/>
+          <a:p>
+            <a:pPr algn="ctr" indent="0" marL="0">
+              <a:buNone/>
+            </a:pPr>
+            <a:r>
+              <a:rPr lang="en-US" sz="1600" b="1" dirty="0">
+                <a:solidFill>
+                  <a:schemeClr val="tx1"/>
+                </a:solidFill>
+              </a:rPr>
+              <a:t>2  시장지배력</a:t>
+            </a:r>
+            <a:endParaRPr lang="en-US" sz="1600" dirty="0"/>
+          </a:p>
+        </p:txBody>
+      </p:sp>
+      <p:sp>
+        <p:nvSpPr>
+          <p:cNvPr id="7" name="Text 4"/>
+          <p:cNvSpPr/>
+          <p:nvPr/>
+        </p:nvSpPr>
+        <p:spPr>
+          <a:xfrm>
+            <a:off x="7863840" y="4434840"/>
+            <a:ext cx="3776472" cy="594360"/>
+          </a:xfrm>
+          <a:prstGeom prst="chevron">
+            <a:avLst/>
+          </a:prstGeom>
+          <a:solidFill>
+            <a:schemeClr val="accent1"/>
+          </a:solidFill>
+          <a:ln/>
+        </p:spPr>
+        <p:txBody>
+          <a:bodyPr wrap="square" lIns="0" tIns="0" rIns="0" bIns="0" rtlCol="0" anchor="ctr"/>
+          <a:lstStyle/>
+          <a:p>
+            <a:pPr algn="ctr" indent="0" marL="0">
+              <a:buNone/>
+            </a:pPr>
+            <a:r>
+              <a:rPr lang="en-US" sz="1600" b="1" dirty="0">
+                <a:solidFill>
+                  <a:schemeClr val="bg1"/>
+                </a:solidFill>
+              </a:rPr>
+              <a:t>3  문제 행위와 법적 판단</a:t>
+            </a:r>
+            <a:endParaRPr lang="en-US" sz="1600" dirty="0"/>
+          </a:p>
+        </p:txBody>
+      </p:sp>
+      <p:sp>
+        <p:nvSpPr>
+          <p:cNvPr id="8" name="Text 5"/>
           <p:cNvSpPr txBox="1"/>
           <p:nvPr/>
         </p:nvSpPr>
         <p:spPr>
           <a:xfrm>
-            <a:off x="868680" y="4617720"/>
-            <a:ext cx="10454335" cy="1097280"/>
-          </a:xfrm>
-          <a:prstGeom prst="rect">
-            <a:avLst/>
-          </a:prstGeom>
-          <a:noFill/>
-          <a:ln/>
-        </p:spPr>
-        <p:txBody>
-          <a:bodyPr wrap="square" lIns="0" tIns="0" rIns="0" bIns="0" rtlCol="0" anchor="ctr"/>
-          <a:lstStyle/>
-          <a:p>
-            <a:pPr indent="0" marL="0">
-              <a:lnSpc>
-                <a:spcPct val="125000"/>
-              </a:lnSpc>
-              <a:buNone/>
-            </a:pPr>
-            <a:r>
-              <a:rPr lang="en-US" sz="1700" b="1" dirty="0">
+            <a:off x="548640" y="5166360"/>
+            <a:ext cx="3776472" cy="411480"/>
+          </a:xfrm>
+          <a:prstGeom prst="rect">
+            <a:avLst/>
+          </a:prstGeom>
+          <a:noFill/>
+          <a:ln/>
+        </p:spPr>
+        <p:txBody>
+          <a:bodyPr wrap="square" lIns="0" tIns="0" rIns="0" bIns="0" rtlCol="0" anchor="t"/>
+          <a:lstStyle/>
+          <a:p>
+            <a:pPr algn="ctr" indent="0" marL="0">
+              <a:lnSpc>
+                <a:spcPct val="110000"/>
+              </a:lnSpc>
+              <a:buNone/>
+            </a:pPr>
+            <a:r>
+              <a:rPr lang="en-US" sz="1800" b="1" dirty="0">
                 <a:solidFill>
                   <a:schemeClr val="tx1"/>
                 </a:solidFill>
               </a:rPr>
-              <a:t>세 사례는 법적 성격이 서로 다름</a:t>
-            </a:r>
-            <a:endParaRPr lang="en-US" sz="1600" dirty="0"/>
-          </a:p>
-          <a:p>
-            <a:pPr indent="0" marL="0">
-              <a:lnSpc>
-                <a:spcPct val="125000"/>
-              </a:lnSpc>
-              <a:buNone/>
-            </a:pPr>
-            <a:r>
-              <a:rPr lang="en-US" sz="1500" dirty="0">
+              <a:t>배민-요기요</a:t>
+            </a:r>
+            <a:endParaRPr lang="en-US" sz="1800" dirty="0"/>
+          </a:p>
+        </p:txBody>
+      </p:sp>
+      <p:sp>
+        <p:nvSpPr>
+          <p:cNvPr id="9" name="Text 6"/>
+          <p:cNvSpPr txBox="1"/>
+          <p:nvPr/>
+        </p:nvSpPr>
+        <p:spPr>
+          <a:xfrm>
+            <a:off x="4206240" y="5166360"/>
+            <a:ext cx="3776472" cy="411480"/>
+          </a:xfrm>
+          <a:prstGeom prst="rect">
+            <a:avLst/>
+          </a:prstGeom>
+          <a:noFill/>
+          <a:ln/>
+        </p:spPr>
+        <p:txBody>
+          <a:bodyPr wrap="square" lIns="0" tIns="0" rIns="0" bIns="0" rtlCol="0" anchor="t"/>
+          <a:lstStyle/>
+          <a:p>
+            <a:pPr algn="ctr" indent="0" marL="0">
+              <a:lnSpc>
+                <a:spcPct val="110000"/>
+              </a:lnSpc>
+              <a:buNone/>
+            </a:pPr>
+            <a:r>
+              <a:rPr lang="en-US" sz="1800" b="1" dirty="0">
                 <a:solidFill>
                   <a:schemeClr val="tx1"/>
                 </a:solidFill>
               </a:rPr>
-              <a:t>하나의 ‘독점’으로 묶기보다, 시장 구조 · 운영 행위 · 경쟁법 대응을 나눠서 보려고 고른 사례들</a:t>
-            </a:r>
-            <a:endParaRPr lang="en-US" sz="1600" dirty="0"/>
-          </a:p>
-        </p:txBody>
-      </p:sp>
-      <p:sp>
-        <p:nvSpPr>
-          <p:cNvPr id="6" name="Text 3"/>
+              <a:t>구글 쇼핑</a:t>
+            </a:r>
+            <a:endParaRPr lang="en-US" sz="1800" dirty="0"/>
+          </a:p>
+        </p:txBody>
+      </p:sp>
+      <p:sp>
+        <p:nvSpPr>
+          <p:cNvPr id="10" name="Text 7"/>
+          <p:cNvSpPr txBox="1"/>
+          <p:nvPr/>
+        </p:nvSpPr>
+        <p:spPr>
+          <a:xfrm>
+            <a:off x="7863840" y="5166360"/>
+            <a:ext cx="3776472" cy="411480"/>
+          </a:xfrm>
+          <a:prstGeom prst="rect">
+            <a:avLst/>
+          </a:prstGeom>
+          <a:noFill/>
+          <a:ln/>
+        </p:spPr>
+        <p:txBody>
+          <a:bodyPr wrap="square" lIns="0" tIns="0" rIns="0" bIns="0" rtlCol="0" anchor="t"/>
+          <a:lstStyle/>
+          <a:p>
+            <a:pPr algn="ctr" indent="0" marL="0">
+              <a:lnSpc>
+                <a:spcPct val="110000"/>
+              </a:lnSpc>
+              <a:buNone/>
+            </a:pPr>
+            <a:r>
+              <a:rPr lang="en-US" sz="1800" b="1" dirty="0">
+                <a:solidFill>
+                  <a:schemeClr val="tx1"/>
+                </a:solidFill>
+              </a:rPr>
+              <a:t>쿠팡, 구글 쇼핑</a:t>
+            </a:r>
+            <a:endParaRPr lang="en-US" sz="1800" dirty="0"/>
+          </a:p>
+        </p:txBody>
+      </p:sp>
+      <p:sp>
+        <p:nvSpPr>
+          <p:cNvPr id="11" name="Text 8"/>
           <p:cNvSpPr txBox="1"/>
           <p:nvPr/>
         </p:nvSpPr>
@@ -4339,7 +4518,7 @@
                   <a:schemeClr val="accent5"/>
                 </a:solidFill>
               </a:rPr>
-              <a:t>출처: 사례별 출처는 8~10번 슬라이드 하단 참고  |  2026.10.1. 확인</a:t>
+              <a:t>출처: 사례별 출처는 8~10번 슬라이드 참고</a:t>
             </a:r>
             <a:endParaRPr lang="en-US" sz="1000" dirty="0"/>
           </a:p>
@@ -4447,7 +4626,7 @@
                   <a:schemeClr val="tx1"/>
                 </a:solidFill>
               </a:rPr>
-              <a:t>편리함과 문제는 같은 구조에서 나옴</a:t>
+              <a:t>같은 구조가 만드는 편익과 문제</a:t>
             </a:r>
             <a:endParaRPr lang="en-US" sz="2800" dirty="0"/>
           </a:p>
@@ -4476,12 +4655,11 @@
             <a:tbl>
               <a:tblPr/>
               <a:tblGrid>
-                <a:gridCol w="2514600"/>
-                <a:gridCol w="3291840"/>
-                <a:gridCol w="3611880"/>
-                <a:gridCol w="1676095"/>
+                <a:gridCol w="2743200"/>
+                <a:gridCol w="4023360"/>
+                <a:gridCol w="4327855"/>
               </a:tblGrid>
-              <a:tr h="457200">
+              <a:tr h="502920">
                 <a:tc>
                   <a:txBody>
                     <a:bodyPr/>
@@ -4501,7 +4679,7 @@
                       <a:endParaRPr lang="en-US" sz="1500" dirty="0"/>
                     </a:p>
                   </a:txBody>
-                  <a:tcPr marL="137160" marR="137160" marT="54864" marB="54864" anchor="ctr">
+                  <a:tcPr marL="164592" marR="164592" marT="54864" marB="54864" anchor="ctr">
                     <a:lnL w="9525" cap="flat" cmpd="sng" algn="ctr">
                       <a:solidFill>
                         <a:schemeClr val="accent6"/>
@@ -4562,7 +4740,7 @@
                       <a:endParaRPr lang="en-US" sz="1500" dirty="0"/>
                     </a:p>
                   </a:txBody>
-                  <a:tcPr marL="137160" marR="137160" marT="54864" marB="54864" anchor="ctr">
+                  <a:tcPr marL="164592" marR="164592" marT="54864" marB="54864" anchor="ctr">
                     <a:lnL w="9525" cap="flat" cmpd="sng" algn="ctr">
                       <a:solidFill>
                         <a:schemeClr val="accent6"/>
@@ -4623,7 +4801,7 @@
                       <a:endParaRPr lang="en-US" sz="1500" dirty="0"/>
                     </a:p>
                   </a:txBody>
-                  <a:tcPr marL="137160" marR="137160" marT="54864" marB="54864" anchor="ctr">
+                  <a:tcPr marL="164592" marR="164592" marT="54864" marB="54864" anchor="ctr">
                     <a:lnL w="9525" cap="flat" cmpd="sng" algn="ctr">
                       <a:solidFill>
                         <a:schemeClr val="accent6"/>
@@ -4665,69 +4843,8 @@
                     </a:solidFill>
                   </a:tcPr>
                 </a:tc>
-                <a:tc>
-                  <a:txBody>
-                    <a:bodyPr/>
-                    <a:lstStyle/>
-                    <a:p>
-                      <a:pPr indent="0" marL="0">
-                        <a:buNone/>
-                      </a:pPr>
-                      <a:r>
-                        <a:rPr lang="en-US" sz="1500" b="1" dirty="0">
-                          <a:solidFill>
-                            <a:schemeClr val="tx1"/>
-                          </a:solidFill>
-                        </a:rPr>
-                        <a:t>관련 사례</a:t>
-                      </a:r>
-                      <a:endParaRPr lang="en-US" sz="1500" dirty="0"/>
-                    </a:p>
-                  </a:txBody>
-                  <a:tcPr marL="137160" marR="137160" marT="54864" marB="54864" anchor="ctr">
-                    <a:lnL w="9525" cap="flat" cmpd="sng" algn="ctr">
-                      <a:solidFill>
-                        <a:schemeClr val="accent6"/>
-                      </a:solidFill>
-                      <a:prstDash val="solid"/>
-                      <a:round/>
-                      <a:headEnd type="none" w="med" len="med"/>
-                      <a:tailEnd type="none" w="med" len="med"/>
-                    </a:lnL>
-                    <a:lnR w="9525" cap="flat" cmpd="sng" algn="ctr">
-                      <a:solidFill>
-                        <a:schemeClr val="accent6"/>
-                      </a:solidFill>
-                      <a:prstDash val="solid"/>
-                      <a:round/>
-                      <a:headEnd type="none" w="med" len="med"/>
-                      <a:tailEnd type="none" w="med" len="med"/>
-                    </a:lnR>
-                    <a:lnT w="9525" cap="flat" cmpd="sng" algn="ctr">
-                      <a:solidFill>
-                        <a:schemeClr val="accent6"/>
-                      </a:solidFill>
-                      <a:prstDash val="solid"/>
-                      <a:round/>
-                      <a:headEnd type="none" w="med" len="med"/>
-                      <a:tailEnd type="none" w="med" len="med"/>
-                    </a:lnT>
-                    <a:lnB w="9525" cap="flat" cmpd="sng" algn="ctr">
-                      <a:solidFill>
-                        <a:schemeClr val="accent6"/>
-                      </a:solidFill>
-                      <a:prstDash val="solid"/>
-                      <a:round/>
-                      <a:headEnd type="none" w="med" len="med"/>
-                      <a:tailEnd type="none" w="med" len="med"/>
-                    </a:lnB>
-                    <a:solidFill>
-                      <a:schemeClr val="bg2"/>
-                    </a:solidFill>
-                  </a:tcPr>
-                </a:tc>
               </a:tr>
-              <a:tr h="749808">
+              <a:tr h="841248">
                 <a:tc>
                   <a:txBody>
                     <a:bodyPr/>
@@ -4747,7 +4864,7 @@
                       <a:endParaRPr lang="en-US" sz="1700" dirty="0"/>
                     </a:p>
                   </a:txBody>
-                  <a:tcPr marL="137160" marR="137160" marT="54864" marB="54864" anchor="ctr">
+                  <a:tcPr marL="164592" marR="164592" marT="54864" marB="54864" anchor="ctr">
                     <a:lnL w="9525" cap="flat" cmpd="sng" algn="ctr">
                       <a:solidFill>
                         <a:schemeClr val="accent6"/>
@@ -4795,17 +4912,17 @@
                         <a:buNone/>
                       </a:pPr>
                       <a:r>
-                        <a:rPr lang="en-US" sz="1500" dirty="0">
+                        <a:rPr lang="en-US" sz="1600" dirty="0">
                           <a:solidFill>
                             <a:schemeClr val="tx1"/>
                           </a:solidFill>
                         </a:rPr>
                         <a:t>선택지가 늘고 서로 만나기 쉬워짐</a:t>
                       </a:r>
-                      <a:endParaRPr lang="en-US" sz="1500" dirty="0"/>
+                      <a:endParaRPr lang="en-US" sz="1600" dirty="0"/>
                     </a:p>
                   </a:txBody>
-                  <a:tcPr marL="137160" marR="137160" marT="54864" marB="54864" anchor="ctr">
+                  <a:tcPr marL="164592" marR="164592" marT="54864" marB="54864" anchor="ctr">
                     <a:lnL w="9525" cap="flat" cmpd="sng" algn="ctr">
                       <a:solidFill>
                         <a:schemeClr val="accent6"/>
@@ -4853,75 +4970,17 @@
                         <a:buNone/>
                       </a:pPr>
                       <a:r>
-                        <a:rPr lang="en-US" sz="1500" dirty="0">
+                        <a:rPr lang="en-US" sz="1600" dirty="0">
                           <a:solidFill>
                             <a:schemeClr val="tx1"/>
                           </a:solidFill>
                         </a:rPr>
                         <a:t>후발 사업자가 양쪽 이용자를 모으기 어려움</a:t>
                       </a:r>
-                      <a:endParaRPr lang="en-US" sz="1500" dirty="0"/>
+                      <a:endParaRPr lang="en-US" sz="1600" dirty="0"/>
                     </a:p>
                   </a:txBody>
-                  <a:tcPr marL="137160" marR="137160" marT="54864" marB="54864" anchor="ctr">
-                    <a:lnL w="9525" cap="flat" cmpd="sng" algn="ctr">
-                      <a:solidFill>
-                        <a:schemeClr val="accent6"/>
-                      </a:solidFill>
-                      <a:prstDash val="solid"/>
-                      <a:round/>
-                      <a:headEnd type="none" w="med" len="med"/>
-                      <a:tailEnd type="none" w="med" len="med"/>
-                    </a:lnL>
-                    <a:lnR w="9525" cap="flat" cmpd="sng" algn="ctr">
-                      <a:solidFill>
-                        <a:schemeClr val="accent6"/>
-                      </a:solidFill>
-                      <a:prstDash val="solid"/>
-                      <a:round/>
-                      <a:headEnd type="none" w="med" len="med"/>
-                      <a:tailEnd type="none" w="med" len="med"/>
-                    </a:lnR>
-                    <a:lnT w="9525" cap="flat" cmpd="sng" algn="ctr">
-                      <a:solidFill>
-                        <a:schemeClr val="accent6"/>
-                      </a:solidFill>
-                      <a:prstDash val="solid"/>
-                      <a:round/>
-                      <a:headEnd type="none" w="med" len="med"/>
-                      <a:tailEnd type="none" w="med" len="med"/>
-                    </a:lnT>
-                    <a:lnB w="9525" cap="flat" cmpd="sng" algn="ctr">
-                      <a:solidFill>
-                        <a:schemeClr val="accent6"/>
-                      </a:solidFill>
-                      <a:prstDash val="solid"/>
-                      <a:round/>
-                      <a:headEnd type="none" w="med" len="med"/>
-                      <a:tailEnd type="none" w="med" len="med"/>
-                    </a:lnB>
-                  </a:tcPr>
-                </a:tc>
-                <a:tc>
-                  <a:txBody>
-                    <a:bodyPr/>
-                    <a:lstStyle/>
-                    <a:p>
-                      <a:pPr indent="0" marL="0">
-                        <a:buNone/>
-                      </a:pPr>
-                      <a:r>
-                        <a:rPr lang="en-US" sz="1300" dirty="0">
-                          <a:solidFill>
-                            <a:schemeClr val="accent5"/>
-                          </a:solidFill>
-                        </a:rPr>
-                        <a:t>배민-요기요</a:t>
-                      </a:r>
-                      <a:endParaRPr lang="en-US" sz="1300" dirty="0"/>
-                    </a:p>
-                  </a:txBody>
-                  <a:tcPr marL="137160" marR="137160" marT="54864" marB="54864" anchor="ctr">
+                  <a:tcPr marL="164592" marR="164592" marT="54864" marB="54864" anchor="ctr">
                     <a:lnL w="9525" cap="flat" cmpd="sng" algn="ctr">
                       <a:solidFill>
                         <a:schemeClr val="accent6"/>
@@ -4961,7 +5020,7 @@
                   </a:tcPr>
                 </a:tc>
               </a:tr>
-              <a:tr h="749808">
+              <a:tr h="841248">
                 <a:tc>
                   <a:txBody>
                     <a:bodyPr/>
@@ -4981,7 +5040,7 @@
                       <a:endParaRPr lang="en-US" sz="1700" dirty="0"/>
                     </a:p>
                   </a:txBody>
-                  <a:tcPr marL="137160" marR="137160" marT="54864" marB="54864" anchor="ctr">
+                  <a:tcPr marL="164592" marR="164592" marT="54864" marB="54864" anchor="ctr">
                     <a:lnL w="9525" cap="flat" cmpd="sng" algn="ctr">
                       <a:solidFill>
                         <a:schemeClr val="accent6"/>
@@ -5029,17 +5088,17 @@
                         <a:buNone/>
                       </a:pPr>
                       <a:r>
-                        <a:rPr lang="en-US" sz="1500" dirty="0">
+                        <a:rPr lang="en-US" sz="1600" dirty="0">
                           <a:solidFill>
                             <a:schemeClr val="tx1"/>
                           </a:solidFill>
                         </a:rPr>
                         <a:t>탐색 비용과 정보 비대칭이 줄어듦</a:t>
                       </a:r>
-                      <a:endParaRPr lang="en-US" sz="1500" dirty="0"/>
+                      <a:endParaRPr lang="en-US" sz="1600" dirty="0"/>
                     </a:p>
                   </a:txBody>
-                  <a:tcPr marL="137160" marR="137160" marT="54864" marB="54864" anchor="ctr">
+                  <a:tcPr marL="164592" marR="164592" marT="54864" marB="54864" anchor="ctr">
                     <a:lnL w="9525" cap="flat" cmpd="sng" algn="ctr">
                       <a:solidFill>
                         <a:schemeClr val="accent6"/>
@@ -5087,75 +5146,17 @@
                         <a:buNone/>
                       </a:pPr>
                       <a:r>
-                        <a:rPr lang="en-US" sz="1500" dirty="0">
+                        <a:rPr lang="en-US" sz="1600" dirty="0">
                           <a:solidFill>
                             <a:schemeClr val="tx1"/>
                           </a:solidFill>
                         </a:rPr>
                         <a:t>노출 기준을 자사에 유리하게 바꿀 유인</a:t>
                       </a:r>
-                      <a:endParaRPr lang="en-US" sz="1500" dirty="0"/>
+                      <a:endParaRPr lang="en-US" sz="1600" dirty="0"/>
                     </a:p>
                   </a:txBody>
-                  <a:tcPr marL="137160" marR="137160" marT="54864" marB="54864" anchor="ctr">
-                    <a:lnL w="9525" cap="flat" cmpd="sng" algn="ctr">
-                      <a:solidFill>
-                        <a:schemeClr val="accent6"/>
-                      </a:solidFill>
-                      <a:prstDash val="solid"/>
-                      <a:round/>
-                      <a:headEnd type="none" w="med" len="med"/>
-                      <a:tailEnd type="none" w="med" len="med"/>
-                    </a:lnL>
-                    <a:lnR w="9525" cap="flat" cmpd="sng" algn="ctr">
-                      <a:solidFill>
-                        <a:schemeClr val="accent6"/>
-                      </a:solidFill>
-                      <a:prstDash val="solid"/>
-                      <a:round/>
-                      <a:headEnd type="none" w="med" len="med"/>
-                      <a:tailEnd type="none" w="med" len="med"/>
-                    </a:lnR>
-                    <a:lnT w="9525" cap="flat" cmpd="sng" algn="ctr">
-                      <a:solidFill>
-                        <a:schemeClr val="accent6"/>
-                      </a:solidFill>
-                      <a:prstDash val="solid"/>
-                      <a:round/>
-                      <a:headEnd type="none" w="med" len="med"/>
-                      <a:tailEnd type="none" w="med" len="med"/>
-                    </a:lnT>
-                    <a:lnB w="9525" cap="flat" cmpd="sng" algn="ctr">
-                      <a:solidFill>
-                        <a:schemeClr val="accent6"/>
-                      </a:solidFill>
-                      <a:prstDash val="solid"/>
-                      <a:round/>
-                      <a:headEnd type="none" w="med" len="med"/>
-                      <a:tailEnd type="none" w="med" len="med"/>
-                    </a:lnB>
-                  </a:tcPr>
-                </a:tc>
-                <a:tc>
-                  <a:txBody>
-                    <a:bodyPr/>
-                    <a:lstStyle/>
-                    <a:p>
-                      <a:pPr indent="0" marL="0">
-                        <a:buNone/>
-                      </a:pPr>
-                      <a:r>
-                        <a:rPr lang="en-US" sz="1300" dirty="0">
-                          <a:solidFill>
-                            <a:schemeClr val="accent5"/>
-                          </a:solidFill>
-                        </a:rPr>
-                        <a:t>쿠팡, 구글</a:t>
-                      </a:r>
-                      <a:endParaRPr lang="en-US" sz="1300" dirty="0"/>
-                    </a:p>
-                  </a:txBody>
-                  <a:tcPr marL="137160" marR="137160" marT="54864" marB="54864" anchor="ctr">
+                  <a:tcPr marL="164592" marR="164592" marT="54864" marB="54864" anchor="ctr">
                     <a:lnL w="9525" cap="flat" cmpd="sng" algn="ctr">
                       <a:solidFill>
                         <a:schemeClr val="accent6"/>
@@ -5195,7 +5196,7 @@
                   </a:tcPr>
                 </a:tc>
               </a:tr>
-              <a:tr h="749808">
+              <a:tr h="841248">
                 <a:tc>
                   <a:txBody>
                     <a:bodyPr/>
@@ -5215,7 +5216,7 @@
                       <a:endParaRPr lang="en-US" sz="1700" dirty="0"/>
                     </a:p>
                   </a:txBody>
-                  <a:tcPr marL="137160" marR="137160" marT="54864" marB="54864" anchor="ctr">
+                  <a:tcPr marL="164592" marR="164592" marT="54864" marB="54864" anchor="ctr">
                     <a:lnL w="9525" cap="flat" cmpd="sng" algn="ctr">
                       <a:solidFill>
                         <a:schemeClr val="accent6"/>
@@ -5263,17 +5264,17 @@
                         <a:buNone/>
                       </a:pPr>
                       <a:r>
-                        <a:rPr lang="en-US" sz="1500" dirty="0">
+                        <a:rPr lang="en-US" sz="1600" dirty="0">
                           <a:solidFill>
                             <a:schemeClr val="tx1"/>
                           </a:solidFill>
                         </a:rPr>
                         <a:t>거래가 편해지고 배송이 효율적</a:t>
                       </a:r>
-                      <a:endParaRPr lang="en-US" sz="1500" dirty="0"/>
+                      <a:endParaRPr lang="en-US" sz="1600" dirty="0"/>
                     </a:p>
                   </a:txBody>
-                  <a:tcPr marL="137160" marR="137160" marT="54864" marB="54864" anchor="ctr">
+                  <a:tcPr marL="164592" marR="164592" marT="54864" marB="54864" anchor="ctr">
                     <a:lnL w="9525" cap="flat" cmpd="sng" algn="ctr">
                       <a:solidFill>
                         <a:schemeClr val="accent6"/>
@@ -5321,75 +5322,17 @@
                         <a:buNone/>
                       </a:pPr>
                       <a:r>
-                        <a:rPr lang="en-US" sz="1500" dirty="0">
+                        <a:rPr lang="en-US" sz="1600" dirty="0">
                           <a:solidFill>
                             <a:schemeClr val="tx1"/>
                           </a:solidFill>
                         </a:rPr>
                         <a:t>특정 서비스 의존, 교섭력 차이</a:t>
                       </a:r>
-                      <a:endParaRPr lang="en-US" sz="1500" dirty="0"/>
+                      <a:endParaRPr lang="en-US" sz="1600" dirty="0"/>
                     </a:p>
                   </a:txBody>
-                  <a:tcPr marL="137160" marR="137160" marT="54864" marB="54864" anchor="ctr">
-                    <a:lnL w="9525" cap="flat" cmpd="sng" algn="ctr">
-                      <a:solidFill>
-                        <a:schemeClr val="accent6"/>
-                      </a:solidFill>
-                      <a:prstDash val="solid"/>
-                      <a:round/>
-                      <a:headEnd type="none" w="med" len="med"/>
-                      <a:tailEnd type="none" w="med" len="med"/>
-                    </a:lnL>
-                    <a:lnR w="9525" cap="flat" cmpd="sng" algn="ctr">
-                      <a:solidFill>
-                        <a:schemeClr val="accent6"/>
-                      </a:solidFill>
-                      <a:prstDash val="solid"/>
-                      <a:round/>
-                      <a:headEnd type="none" w="med" len="med"/>
-                      <a:tailEnd type="none" w="med" len="med"/>
-                    </a:lnR>
-                    <a:lnT w="9525" cap="flat" cmpd="sng" algn="ctr">
-                      <a:solidFill>
-                        <a:schemeClr val="accent6"/>
-                      </a:solidFill>
-                      <a:prstDash val="solid"/>
-                      <a:round/>
-                      <a:headEnd type="none" w="med" len="med"/>
-                      <a:tailEnd type="none" w="med" len="med"/>
-                    </a:lnT>
-                    <a:lnB w="9525" cap="flat" cmpd="sng" algn="ctr">
-                      <a:solidFill>
-                        <a:schemeClr val="accent6"/>
-                      </a:solidFill>
-                      <a:prstDash val="solid"/>
-                      <a:round/>
-                      <a:headEnd type="none" w="med" len="med"/>
-                      <a:tailEnd type="none" w="med" len="med"/>
-                    </a:lnB>
-                  </a:tcPr>
-                </a:tc>
-                <a:tc>
-                  <a:txBody>
-                    <a:bodyPr/>
-                    <a:lstStyle/>
-                    <a:p>
-                      <a:pPr indent="0" marL="0">
-                        <a:buNone/>
-                      </a:pPr>
-                      <a:r>
-                        <a:rPr lang="en-US" sz="1300" dirty="0">
-                          <a:solidFill>
-                            <a:schemeClr val="accent5"/>
-                          </a:solidFill>
-                        </a:rPr>
-                        <a:t>배달 정산 구조</a:t>
-                      </a:r>
-                      <a:endParaRPr lang="en-US" sz="1300" dirty="0"/>
-                    </a:p>
-                  </a:txBody>
-                  <a:tcPr marL="137160" marR="137160" marT="54864" marB="54864" anchor="ctr">
+                  <a:tcPr marL="164592" marR="164592" marT="54864" marB="54864" anchor="ctr">
                     <a:lnL w="9525" cap="flat" cmpd="sng" algn="ctr">
                       <a:solidFill>
                         <a:schemeClr val="accent6"/>
@@ -5429,7 +5372,7 @@
                   </a:tcPr>
                 </a:tc>
               </a:tr>
-              <a:tr h="749808">
+              <a:tr h="841248">
                 <a:tc>
                   <a:txBody>
                     <a:bodyPr/>
@@ -5449,7 +5392,7 @@
                       <a:endParaRPr lang="en-US" sz="1700" dirty="0"/>
                     </a:p>
                   </a:txBody>
-                  <a:tcPr marL="137160" marR="137160" marT="54864" marB="54864" anchor="ctr">
+                  <a:tcPr marL="164592" marR="164592" marT="54864" marB="54864" anchor="ctr">
                     <a:lnL w="9525" cap="flat" cmpd="sng" algn="ctr">
                       <a:solidFill>
                         <a:schemeClr val="accent6"/>
@@ -5497,17 +5440,17 @@
                         <a:buNone/>
                       </a:pPr>
                       <a:r>
-                        <a:rPr lang="en-US" sz="1500" dirty="0">
+                        <a:rPr lang="en-US" sz="1600" dirty="0">
                           <a:solidFill>
                             <a:schemeClr val="tx1"/>
                           </a:solidFill>
                         </a:rPr>
                         <a:t>공급·품질·배송을 직접 관리</a:t>
                       </a:r>
-                      <a:endParaRPr lang="en-US" sz="1500" dirty="0"/>
+                      <a:endParaRPr lang="en-US" sz="1600" dirty="0"/>
                     </a:p>
                   </a:txBody>
-                  <a:tcPr marL="137160" marR="137160" marT="54864" marB="54864" anchor="ctr">
+                  <a:tcPr marL="164592" marR="164592" marT="54864" marB="54864" anchor="ctr">
                     <a:lnL w="9525" cap="flat" cmpd="sng" algn="ctr">
                       <a:solidFill>
                         <a:schemeClr val="accent6"/>
@@ -5555,75 +5498,17 @@
                         <a:buNone/>
                       </a:pPr>
                       <a:r>
-                        <a:rPr lang="en-US" sz="1500" dirty="0">
+                        <a:rPr lang="en-US" sz="1600" dirty="0">
                           <a:solidFill>
                             <a:schemeClr val="tx1"/>
                           </a:solidFill>
                         </a:rPr>
                         <a:t>중개자이면서 판매자라서 생기는 이해충돌</a:t>
                       </a:r>
-                      <a:endParaRPr lang="en-US" sz="1500" dirty="0"/>
+                      <a:endParaRPr lang="en-US" sz="1600" dirty="0"/>
                     </a:p>
                   </a:txBody>
-                  <a:tcPr marL="137160" marR="137160" marT="54864" marB="54864" anchor="ctr">
-                    <a:lnL w="9525" cap="flat" cmpd="sng" algn="ctr">
-                      <a:solidFill>
-                        <a:schemeClr val="accent6"/>
-                      </a:solidFill>
-                      <a:prstDash val="solid"/>
-                      <a:round/>
-                      <a:headEnd type="none" w="med" len="med"/>
-                      <a:tailEnd type="none" w="med" len="med"/>
-                    </a:lnL>
-                    <a:lnR w="9525" cap="flat" cmpd="sng" algn="ctr">
-                      <a:solidFill>
-                        <a:schemeClr val="accent6"/>
-                      </a:solidFill>
-                      <a:prstDash val="solid"/>
-                      <a:round/>
-                      <a:headEnd type="none" w="med" len="med"/>
-                      <a:tailEnd type="none" w="med" len="med"/>
-                    </a:lnR>
-                    <a:lnT w="9525" cap="flat" cmpd="sng" algn="ctr">
-                      <a:solidFill>
-                        <a:schemeClr val="accent6"/>
-                      </a:solidFill>
-                      <a:prstDash val="solid"/>
-                      <a:round/>
-                      <a:headEnd type="none" w="med" len="med"/>
-                      <a:tailEnd type="none" w="med" len="med"/>
-                    </a:lnT>
-                    <a:lnB w="9525" cap="flat" cmpd="sng" algn="ctr">
-                      <a:solidFill>
-                        <a:schemeClr val="accent6"/>
-                      </a:solidFill>
-                      <a:prstDash val="solid"/>
-                      <a:round/>
-                      <a:headEnd type="none" w="med" len="med"/>
-                      <a:tailEnd type="none" w="med" len="med"/>
-                    </a:lnB>
-                  </a:tcPr>
-                </a:tc>
-                <a:tc>
-                  <a:txBody>
-                    <a:bodyPr/>
-                    <a:lstStyle/>
-                    <a:p>
-                      <a:pPr indent="0" marL="0">
-                        <a:buNone/>
-                      </a:pPr>
-                      <a:r>
-                        <a:rPr lang="en-US" sz="1300" dirty="0">
-                          <a:solidFill>
-                            <a:schemeClr val="accent5"/>
-                          </a:solidFill>
-                        </a:rPr>
-                        <a:t>쿠팡</a:t>
-                      </a:r>
-                      <a:endParaRPr lang="en-US" sz="1300" dirty="0"/>
-                    </a:p>
-                  </a:txBody>
-                  <a:tcPr marL="137160" marR="137160" marT="54864" marB="54864" anchor="ctr">
+                  <a:tcPr marL="164592" marR="164592" marT="54864" marB="54864" anchor="ctr">
                     <a:lnL w="9525" cap="flat" cmpd="sng" algn="ctr">
                       <a:solidFill>
                         <a:schemeClr val="accent6"/>
@@ -5667,45 +5552,6 @@
           </a:graphicData>
         </a:graphic>
       </p:graphicFrame>
-      <p:sp>
-        <p:nvSpPr>
-          <p:cNvPr id="4" name="Text 1"/>
-          <p:cNvSpPr txBox="1"/>
-          <p:nvPr/>
-        </p:nvSpPr>
-        <p:spPr>
-          <a:xfrm>
-            <a:off x="548640" y="5120640"/>
-            <a:ext cx="11094415" cy="365760"/>
-          </a:xfrm>
-          <a:prstGeom prst="rect">
-            <a:avLst/>
-          </a:prstGeom>
-          <a:noFill/>
-          <a:ln/>
-        </p:spPr>
-        <p:txBody>
-          <a:bodyPr wrap="square" lIns="0" tIns="0" rIns="0" bIns="0" rtlCol="0" anchor="t"/>
-          <a:lstStyle/>
-          <a:p>
-            <a:pPr indent="0" marL="0">
-              <a:lnSpc>
-                <a:spcPct val="110000"/>
-              </a:lnSpc>
-              <a:buNone/>
-            </a:pPr>
-            <a:r>
-              <a:rPr lang="en-US" sz="1400" dirty="0">
-                <a:solidFill>
-                  <a:schemeClr val="accent5"/>
-                </a:solidFill>
-              </a:rPr>
-              <a:t>※ 일반적으로 이렇게 작동할 수 있다는 정리이며, 특정 기업이 전부 해당한다는 뜻은 아님</a:t>
-            </a:r>
-            <a:endParaRPr lang="en-US" sz="1400" dirty="0"/>
-          </a:p>
-        </p:txBody>
-      </p:sp>
       <p:sp>
         <p:nvSpPr>
           <p:cNvPr id="25" name="Slide Number Placeholder 0"/>
@@ -5945,7 +5791,7 @@
                   <a:schemeClr val="accent5"/>
                 </a:solidFill>
               </a:rPr>
-              <a:t>관련: 사례 1 배민-요기요</a:t>
+              <a:t>배민-요기요 사례에서 쓰인 방식</a:t>
             </a:r>
             <a:endParaRPr lang="en-US" sz="1300" dirty="0"/>
           </a:p>
@@ -6238,7 +6084,7 @@
                   <a:schemeClr val="accent5"/>
                 </a:solidFill>
               </a:rPr>
-              <a:t>관련: 사례 2·3, 배달 정산</a:t>
+              <a:t>쿠팡·구글 사례, 배달 정산과 연결</a:t>
             </a:r>
             <a:endParaRPr lang="en-US" sz="1300" dirty="0"/>
           </a:p>
@@ -6316,7 +6162,7 @@
                   <a:schemeClr val="tx1"/>
                 </a:solidFill>
               </a:rPr>
-              <a:t>노출 이유와 실제 부담·할인 주체를 비교할 수 있음</a:t>
+              <a:t>노출 이유와 실제 부담·할인 주체를 비교 가능</a:t>
             </a:r>
             <a:endParaRPr lang="en-US" sz="1700" dirty="0"/>
           </a:p>
@@ -6536,14 +6382,14 @@
               <a:buNone/>
             </a:pPr>
             <a:r>
-              <a:rPr lang="en-US" sz="2600" b="1" dirty="0">
+              <a:rPr lang="en-US" sz="2800" b="1" dirty="0">
                 <a:solidFill>
                   <a:schemeClr val="accent1"/>
                 </a:solidFill>
               </a:rPr>
-              <a:t>플랫폼의 규모만 보고 위법이라고 단정하지 말고,</a:t>
-            </a:r>
-            <a:endParaRPr lang="en-US" sz="2600" dirty="0"/>
+              <a:t>플랫폼 문제는 ‘얼마나 큰가’보다</a:t>
+            </a:r>
+            <a:endParaRPr lang="en-US" sz="2800" dirty="0"/>
           </a:p>
           <a:p>
             <a:pPr indent="0" marL="0">
@@ -6553,14 +6399,14 @@
               <a:buNone/>
             </a:pPr>
             <a:r>
-              <a:rPr lang="en-US" sz="2600" b="1" dirty="0">
+              <a:rPr lang="en-US" sz="2800" b="1" dirty="0">
                 <a:solidFill>
                   <a:schemeClr val="accent1"/>
                 </a:solidFill>
               </a:rPr>
-              <a:t>경쟁을 제한하는 구조와 행위를 나눠서 살펴봐야 함</a:t>
-            </a:r>
-            <a:endParaRPr lang="en-US" sz="2600" dirty="0"/>
+              <a:t>‘경쟁을 어떻게 막는가’로 봐야 함</a:t>
+            </a:r>
+            <a:endParaRPr lang="en-US" sz="2800" dirty="0"/>
           </a:p>
         </p:txBody>
       </p:sp>
@@ -6597,7 +6443,7 @@
                   <a:schemeClr val="accent5"/>
                 </a:solidFill>
               </a:rPr>
-              <a:t>이렇게 물어볼 수 있음</a:t>
+              <a:t>점검할 질문</a:t>
             </a:r>
             <a:endParaRPr lang="en-US" sz="1500" dirty="0"/>
           </a:p>
@@ -7016,7 +6862,7 @@
                   <a:schemeClr val="tx1"/>
                 </a:solidFill>
               </a:rPr>
-              <a:t>이 돈은 누구에게</a:t>
+              <a:t>식당에는 얼마가</a:t>
             </a:r>
             <a:endParaRPr lang="en-US" sz="3800" dirty="0"/>
           </a:p>
@@ -7033,7 +6879,7 @@
                   <a:schemeClr val="tx1"/>
                 </a:solidFill>
               </a:rPr>
-              <a:t>얼마씩 갈까?</a:t>
+              <a:t>들어올까?</a:t>
             </a:r>
             <a:endParaRPr lang="en-US" sz="3800" dirty="0"/>
           </a:p>
@@ -7086,8 +6932,8 @@
         </p:nvSpPr>
         <p:spPr>
           <a:xfrm>
-            <a:off x="7086600" y="1325880"/>
-            <a:ext cx="4023360" cy="4480560"/>
+            <a:off x="7086600" y="1783080"/>
+            <a:ext cx="4023360" cy="3154680"/>
           </a:xfrm>
           <a:prstGeom prst="rect">
             <a:avLst/>
@@ -7118,7 +6964,7 @@
         </p:nvSpPr>
         <p:spPr>
           <a:xfrm>
-            <a:off x="7406640" y="1645920"/>
+            <a:off x="7406640" y="2103120"/>
             <a:ext cx="3383280" cy="411480"/>
           </a:xfrm>
           <a:prstGeom prst="rect">
@@ -7157,7 +7003,7 @@
         </p:nvSpPr>
         <p:spPr>
           <a:xfrm>
-            <a:off x="7406640" y="2240280"/>
+            <a:off x="7406640" y="2697480"/>
             <a:ext cx="3383280" cy="0"/>
           </a:xfrm>
           <a:prstGeom prst="line">
@@ -7180,7 +7026,7 @@
         </p:nvSpPr>
         <p:spPr>
           <a:xfrm>
-            <a:off x="7406640" y="2423160"/>
+            <a:off x="7406640" y="2880360"/>
             <a:ext cx="2194560" cy="411480"/>
           </a:xfrm>
           <a:prstGeom prst="rect">
@@ -7219,7 +7065,7 @@
         </p:nvSpPr>
         <p:spPr>
           <a:xfrm>
-            <a:off x="9098280" y="2423160"/>
+            <a:off x="9098280" y="2880360"/>
             <a:ext cx="1691640" cy="411480"/>
           </a:xfrm>
           <a:prstGeom prst="rect">
@@ -7252,13 +7098,91 @@
       </p:sp>
       <p:sp>
         <p:nvSpPr>
-          <p:cNvPr id="9" name="Shape 7"/>
+          <p:cNvPr id="9" name="Text 7"/>
+          <p:cNvSpPr txBox="1"/>
+          <p:nvPr/>
+        </p:nvSpPr>
+        <p:spPr>
+          <a:xfrm>
+            <a:off x="7406640" y="3383280"/>
+            <a:ext cx="2194560" cy="411480"/>
+          </a:xfrm>
+          <a:prstGeom prst="rect">
+            <a:avLst/>
+          </a:prstGeom>
+          <a:noFill/>
+          <a:ln/>
+        </p:spPr>
+        <p:txBody>
+          <a:bodyPr wrap="square" lIns="0" tIns="0" rIns="0" bIns="0" rtlCol="0" anchor="t"/>
+          <a:lstStyle/>
+          <a:p>
+            <a:pPr indent="0" marL="0">
+              <a:lnSpc>
+                <a:spcPct val="110000"/>
+              </a:lnSpc>
+              <a:buNone/>
+            </a:pPr>
+            <a:r>
+              <a:rPr lang="en-US" sz="1700" dirty="0">
+                <a:solidFill>
+                  <a:schemeClr val="accent5"/>
+                </a:solidFill>
+              </a:rPr>
+              <a:t>빠지는 돈</a:t>
+            </a:r>
+            <a:endParaRPr lang="en-US" sz="1700" dirty="0"/>
+          </a:p>
+        </p:txBody>
+      </p:sp>
+      <p:sp>
+        <p:nvSpPr>
+          <p:cNvPr id="10" name="Text 8"/>
+          <p:cNvSpPr txBox="1"/>
+          <p:nvPr/>
+        </p:nvSpPr>
+        <p:spPr>
+          <a:xfrm>
+            <a:off x="9098280" y="3383280"/>
+            <a:ext cx="1691640" cy="411480"/>
+          </a:xfrm>
+          <a:prstGeom prst="rect">
+            <a:avLst/>
+          </a:prstGeom>
+          <a:noFill/>
+          <a:ln/>
+        </p:spPr>
+        <p:txBody>
+          <a:bodyPr wrap="square" lIns="0" tIns="0" rIns="0" bIns="0" rtlCol="0" anchor="t"/>
+          <a:lstStyle/>
+          <a:p>
+            <a:pPr algn="r" indent="0" marL="0">
+              <a:lnSpc>
+                <a:spcPct val="110000"/>
+              </a:lnSpc>
+              <a:buNone/>
+            </a:pPr>
+            <a:r>
+              <a:rPr lang="en-US" sz="2000" b="1" dirty="0">
+                <a:solidFill>
+                  <a:schemeClr val="accent2"/>
+                </a:solidFill>
+              </a:rPr>
+              <a:t>?</a:t>
+            </a:r>
+            <a:endParaRPr lang="en-US" sz="2000" dirty="0"/>
+          </a:p>
+        </p:txBody>
+      </p:sp>
+      <p:sp>
+        <p:nvSpPr>
+          <p:cNvPr id="11" name="Shape 9"/>
           <p:cNvSpPr/>
           <p:nvPr/>
         </p:nvSpPr>
         <p:spPr>
           <a:xfrm>
-            <a:off x="7406640" y="3063240"/>
+            <a:off x="7406640" y="3977640"/>
             <a:ext cx="3383280" cy="0"/>
           </a:xfrm>
           <a:prstGeom prst="line">
@@ -7275,91 +7199,13 @@
       </p:sp>
       <p:sp>
         <p:nvSpPr>
-          <p:cNvPr id="10" name="Text 8"/>
-          <p:cNvSpPr txBox="1"/>
-          <p:nvPr/>
-        </p:nvSpPr>
-        <p:spPr>
-          <a:xfrm>
-            <a:off x="7406640" y="3291840"/>
-            <a:ext cx="2194560" cy="411480"/>
-          </a:xfrm>
-          <a:prstGeom prst="rect">
-            <a:avLst/>
-          </a:prstGeom>
-          <a:noFill/>
-          <a:ln/>
-        </p:spPr>
-        <p:txBody>
-          <a:bodyPr wrap="square" lIns="0" tIns="0" rIns="0" bIns="0" rtlCol="0" anchor="t"/>
-          <a:lstStyle/>
-          <a:p>
-            <a:pPr indent="0" marL="0">
-              <a:lnSpc>
-                <a:spcPct val="110000"/>
-              </a:lnSpc>
-              <a:buNone/>
-            </a:pPr>
-            <a:r>
-              <a:rPr lang="en-US" sz="1700" dirty="0">
-                <a:solidFill>
-                  <a:schemeClr val="accent5"/>
-                </a:solidFill>
-              </a:rPr>
-              <a:t>식당 몫</a:t>
-            </a:r>
-            <a:endParaRPr lang="en-US" sz="1700" dirty="0"/>
-          </a:p>
-        </p:txBody>
-      </p:sp>
-      <p:sp>
-        <p:nvSpPr>
-          <p:cNvPr id="11" name="Text 9"/>
-          <p:cNvSpPr txBox="1"/>
-          <p:nvPr/>
-        </p:nvSpPr>
-        <p:spPr>
-          <a:xfrm>
-            <a:off x="9098280" y="3291840"/>
-            <a:ext cx="1691640" cy="411480"/>
-          </a:xfrm>
-          <a:prstGeom prst="rect">
-            <a:avLst/>
-          </a:prstGeom>
-          <a:noFill/>
-          <a:ln/>
-        </p:spPr>
-        <p:txBody>
-          <a:bodyPr wrap="square" lIns="0" tIns="0" rIns="0" bIns="0" rtlCol="0" anchor="t"/>
-          <a:lstStyle/>
-          <a:p>
-            <a:pPr algn="r" indent="0" marL="0">
-              <a:lnSpc>
-                <a:spcPct val="110000"/>
-              </a:lnSpc>
-              <a:buNone/>
-            </a:pPr>
-            <a:r>
-              <a:rPr lang="en-US" sz="2000" b="1" dirty="0">
-                <a:solidFill>
-                  <a:schemeClr val="accent1"/>
-                </a:solidFill>
-              </a:rPr>
-              <a:t>?</a:t>
-            </a:r>
-            <a:endParaRPr lang="en-US" sz="2000" dirty="0"/>
-          </a:p>
-        </p:txBody>
-      </p:sp>
-      <p:sp>
-        <p:nvSpPr>
           <p:cNvPr id="12" name="Text 10"/>
           <p:cNvSpPr txBox="1"/>
           <p:nvPr/>
         </p:nvSpPr>
         <p:spPr>
           <a:xfrm>
-            <a:off x="7406640" y="3931920"/>
+            <a:off x="7406640" y="4160520"/>
             <a:ext cx="2194560" cy="411480"/>
           </a:xfrm>
           <a:prstGeom prst="rect">
@@ -7379,14 +7225,14 @@
               <a:buNone/>
             </a:pPr>
             <a:r>
-              <a:rPr lang="en-US" sz="1700" dirty="0">
-                <a:solidFill>
-                  <a:schemeClr val="accent5"/>
-                </a:solidFill>
-              </a:rPr>
-              <a:t>라이더 몫</a:t>
-            </a:r>
-            <a:endParaRPr lang="en-US" sz="1700" dirty="0"/>
+              <a:rPr lang="en-US" sz="1800" b="1" dirty="0">
+                <a:solidFill>
+                  <a:schemeClr val="tx1"/>
+                </a:solidFill>
+              </a:rPr>
+              <a:t>식당 정산액</a:t>
+            </a:r>
+            <a:endParaRPr lang="en-US" sz="1800" dirty="0"/>
           </a:p>
         </p:txBody>
       </p:sp>
@@ -7398,7 +7244,7 @@
         </p:nvSpPr>
         <p:spPr>
           <a:xfrm>
-            <a:off x="9098280" y="3931920"/>
+            <a:off x="9098280" y="4160520"/>
             <a:ext cx="1691640" cy="411480"/>
           </a:xfrm>
           <a:prstGeom prst="rect">
@@ -7418,137 +7264,20 @@
               <a:buNone/>
             </a:pPr>
             <a:r>
-              <a:rPr lang="en-US" sz="2000" b="1" dirty="0">
+              <a:rPr lang="en-US" sz="2200" b="1" dirty="0">
                 <a:solidFill>
                   <a:schemeClr val="accent1"/>
                 </a:solidFill>
               </a:rPr>
               <a:t>?</a:t>
             </a:r>
-            <a:endParaRPr lang="en-US" sz="2000" dirty="0"/>
-          </a:p>
-        </p:txBody>
-      </p:sp>
-      <p:sp>
-        <p:nvSpPr>
-          <p:cNvPr id="14" name="Text 12"/>
-          <p:cNvSpPr txBox="1"/>
-          <p:nvPr/>
-        </p:nvSpPr>
-        <p:spPr>
-          <a:xfrm>
-            <a:off x="7406640" y="4572000"/>
-            <a:ext cx="2194560" cy="411480"/>
-          </a:xfrm>
-          <a:prstGeom prst="rect">
-            <a:avLst/>
-          </a:prstGeom>
-          <a:noFill/>
-          <a:ln/>
-        </p:spPr>
-        <p:txBody>
-          <a:bodyPr wrap="square" lIns="0" tIns="0" rIns="0" bIns="0" rtlCol="0" anchor="t"/>
-          <a:lstStyle/>
-          <a:p>
-            <a:pPr indent="0" marL="0">
-              <a:lnSpc>
-                <a:spcPct val="110000"/>
-              </a:lnSpc>
-              <a:buNone/>
-            </a:pPr>
-            <a:r>
-              <a:rPr lang="en-US" sz="1700" dirty="0">
-                <a:solidFill>
-                  <a:schemeClr val="accent5"/>
-                </a:solidFill>
-              </a:rPr>
-              <a:t>배달앱 몫</a:t>
-            </a:r>
-            <a:endParaRPr lang="en-US" sz="1700" dirty="0"/>
-          </a:p>
-        </p:txBody>
-      </p:sp>
-      <p:sp>
-        <p:nvSpPr>
-          <p:cNvPr id="15" name="Text 13"/>
-          <p:cNvSpPr txBox="1"/>
-          <p:nvPr/>
-        </p:nvSpPr>
-        <p:spPr>
-          <a:xfrm>
-            <a:off x="9098280" y="4572000"/>
-            <a:ext cx="1691640" cy="411480"/>
-          </a:xfrm>
-          <a:prstGeom prst="rect">
-            <a:avLst/>
-          </a:prstGeom>
-          <a:noFill/>
-          <a:ln/>
-        </p:spPr>
-        <p:txBody>
-          <a:bodyPr wrap="square" lIns="0" tIns="0" rIns="0" bIns="0" rtlCol="0" anchor="t"/>
-          <a:lstStyle/>
-          <a:p>
-            <a:pPr algn="r" indent="0" marL="0">
-              <a:lnSpc>
-                <a:spcPct val="110000"/>
-              </a:lnSpc>
-              <a:buNone/>
-            </a:pPr>
-            <a:r>
-              <a:rPr lang="en-US" sz="2000" b="1" dirty="0">
-                <a:solidFill>
-                  <a:schemeClr val="accent1"/>
-                </a:solidFill>
-              </a:rPr>
-              <a:t>?</a:t>
-            </a:r>
-            <a:endParaRPr lang="en-US" sz="2000" dirty="0"/>
-          </a:p>
-        </p:txBody>
-      </p:sp>
-      <p:sp>
-        <p:nvSpPr>
-          <p:cNvPr id="16" name="Text 14"/>
-          <p:cNvSpPr txBox="1"/>
-          <p:nvPr/>
-        </p:nvSpPr>
-        <p:spPr>
-          <a:xfrm>
-            <a:off x="7406640" y="5212080"/>
-            <a:ext cx="3383280" cy="320040"/>
-          </a:xfrm>
-          <a:prstGeom prst="rect">
-            <a:avLst/>
-          </a:prstGeom>
-          <a:noFill/>
-          <a:ln/>
-        </p:spPr>
-        <p:txBody>
-          <a:bodyPr wrap="square" lIns="0" tIns="0" rIns="0" bIns="0" rtlCol="0" anchor="t"/>
-          <a:lstStyle/>
-          <a:p>
-            <a:pPr algn="ctr" indent="0" marL="0">
-              <a:lnSpc>
-                <a:spcPct val="110000"/>
-              </a:lnSpc>
-              <a:buNone/>
-            </a:pPr>
-            <a:r>
-              <a:rPr lang="en-US" sz="1200" dirty="0">
-                <a:solidFill>
-                  <a:schemeClr val="accent5"/>
-                </a:solidFill>
-              </a:rPr>
-              <a:t>답은 7번 슬라이드에서</a:t>
-            </a:r>
-            <a:endParaRPr lang="en-US" sz="1200" dirty="0"/>
-          </a:p>
-        </p:txBody>
-      </p:sp>
-      <p:sp>
-        <p:nvSpPr>
-          <p:cNvPr id="18" name="Text 0"/>
+            <a:endParaRPr lang="en-US" sz="2200" dirty="0"/>
+          </a:p>
+        </p:txBody>
+      </p:sp>
+      <p:sp>
+        <p:nvSpPr>
+          <p:cNvPr id="15" name="Text 0"/>
           <p:cNvSpPr/>
           <p:nvPr>
             <p:ph idx="100" type="title" hasCustomPrompt="1"/>
@@ -8784,7 +8513,7 @@
                   <a:schemeClr val="accent5"/>
                 </a:solidFill>
               </a:rPr>
-              <a:t>※ 기능을 기준으로 나눈 설명 틀이라, 실제 회사는 여러 유형에 걸쳐 있는 경우가 많음</a:t>
+              <a:t>※ 기능을 기준으로 나눈 것이라, 실제로는 한 회사 안에서 기능이 겹칠 수 있음</a:t>
             </a:r>
             <a:endParaRPr lang="en-US" sz="1400" dirty="0"/>
           </a:p>
@@ -8969,18 +8698,7 @@
                   <a:schemeClr val="tx1"/>
                 </a:solidFill>
               </a:rPr>
-              <a:t>1  </a:t>
-            </a:r>
-            <a:pPr algn="ctr" indent="0" marL="0">
-              <a:buNone/>
-            </a:pPr>
-            <a:r>
-              <a:rPr lang="en-US" sz="1900" b="1" dirty="0">
-                <a:solidFill>
-                  <a:schemeClr val="tx1"/>
-                </a:solidFill>
-              </a:rPr>
-              <a:t>시장구조</a:t>
+              <a:t>1  시장구조</a:t>
             </a:r>
             <a:endParaRPr lang="en-US" sz="1900" dirty="0"/>
           </a:p>
@@ -8989,123 +8707,6 @@
       <p:sp>
         <p:nvSpPr>
           <p:cNvPr id="4" name="Text 2"/>
-          <p:cNvSpPr txBox="1"/>
-          <p:nvPr/>
-        </p:nvSpPr>
-        <p:spPr>
-          <a:xfrm>
-            <a:off x="594360" y="2514600"/>
-            <a:ext cx="3429000" cy="320040"/>
-          </a:xfrm>
-          <a:prstGeom prst="rect">
-            <a:avLst/>
-          </a:prstGeom>
-          <a:noFill/>
-          <a:ln/>
-        </p:spPr>
-        <p:txBody>
-          <a:bodyPr wrap="square" lIns="0" tIns="0" rIns="0" bIns="0" rtlCol="0" anchor="t"/>
-          <a:lstStyle/>
-          <a:p>
-            <a:pPr indent="0" marL="0">
-              <a:lnSpc>
-                <a:spcPct val="110000"/>
-              </a:lnSpc>
-              <a:buNone/>
-            </a:pPr>
-            <a:r>
-              <a:rPr lang="en-US" sz="1300" dirty="0">
-                <a:solidFill>
-                  <a:schemeClr val="accent5"/>
-                </a:solidFill>
-              </a:rPr>
-              <a:t>독점, 과점, 집중</a:t>
-            </a:r>
-            <a:endParaRPr lang="en-US" sz="1300" dirty="0"/>
-          </a:p>
-        </p:txBody>
-      </p:sp>
-      <p:sp>
-        <p:nvSpPr>
-          <p:cNvPr id="5" name="Text 3"/>
-          <p:cNvSpPr txBox="1"/>
-          <p:nvPr/>
-        </p:nvSpPr>
-        <p:spPr>
-          <a:xfrm>
-            <a:off x="594360" y="2852928"/>
-            <a:ext cx="3429000" cy="1051560"/>
-          </a:xfrm>
-          <a:prstGeom prst="rect">
-            <a:avLst/>
-          </a:prstGeom>
-          <a:noFill/>
-          <a:ln/>
-        </p:spPr>
-        <p:txBody>
-          <a:bodyPr wrap="square" lIns="0" tIns="0" rIns="0" bIns="0" rtlCol="0" anchor="t"/>
-          <a:lstStyle/>
-          <a:p>
-            <a:pPr indent="0" marL="0">
-              <a:lnSpc>
-                <a:spcPct val="115000"/>
-              </a:lnSpc>
-              <a:buNone/>
-            </a:pPr>
-            <a:r>
-              <a:rPr lang="en-US" sz="1700" dirty="0">
-                <a:solidFill>
-                  <a:schemeClr val="tx1"/>
-                </a:solidFill>
-              </a:rPr>
-              <a:t>어떤 시장에서 몇 개 사업자에게 거래가 몰리는가?</a:t>
-            </a:r>
-            <a:endParaRPr lang="en-US" sz="1700" dirty="0"/>
-          </a:p>
-        </p:txBody>
-      </p:sp>
-      <p:sp>
-        <p:nvSpPr>
-          <p:cNvPr id="6" name="Text 4"/>
-          <p:cNvSpPr txBox="1"/>
-          <p:nvPr/>
-        </p:nvSpPr>
-        <p:spPr>
-          <a:xfrm>
-            <a:off x="594360" y="3931920"/>
-            <a:ext cx="3429000" cy="685800"/>
-          </a:xfrm>
-          <a:prstGeom prst="rect">
-            <a:avLst/>
-          </a:prstGeom>
-          <a:noFill/>
-          <a:ln/>
-        </p:spPr>
-        <p:txBody>
-          <a:bodyPr wrap="square" lIns="0" tIns="0" rIns="0" bIns="0" rtlCol="0" anchor="t"/>
-          <a:lstStyle/>
-          <a:p>
-            <a:pPr indent="0" marL="0">
-              <a:lnSpc>
-                <a:spcPct val="110000"/>
-              </a:lnSpc>
-              <a:buNone/>
-            </a:pPr>
-            <a:r>
-              <a:rPr lang="en-US" sz="1400" dirty="0">
-                <a:solidFill>
-                  <a:schemeClr val="accent2"/>
-                </a:solidFill>
-              </a:rPr>
-              <a:t>→ 점유율은 시장 범위·지역·연도·산식까지 같이 봐야 함</a:t>
-            </a:r>
-            <a:endParaRPr lang="en-US" sz="1400" dirty="0"/>
-          </a:p>
-        </p:txBody>
-      </p:sp>
-      <p:sp>
-        <p:nvSpPr>
-          <p:cNvPr id="7" name="Text 5"/>
           <p:cNvSpPr/>
           <p:nvPr/>
         </p:nvSpPr>
@@ -9135,18 +8736,7 @@
                   <a:schemeClr val="tx1"/>
                 </a:solidFill>
               </a:rPr>
-              <a:t>2  </a:t>
-            </a:r>
-            <a:pPr algn="ctr" indent="0" marL="0">
-              <a:buNone/>
-            </a:pPr>
-            <a:r>
-              <a:rPr lang="en-US" sz="1900" b="1" dirty="0">
-                <a:solidFill>
-                  <a:schemeClr val="tx1"/>
-                </a:solidFill>
-              </a:rPr>
-              <a:t>시장지배력</a:t>
+              <a:t>2  시장지배력</a:t>
             </a:r>
             <a:endParaRPr lang="en-US" sz="1900" dirty="0"/>
           </a:p>
@@ -9154,124 +8744,7 @@
       </p:sp>
       <p:sp>
         <p:nvSpPr>
-          <p:cNvPr id="8" name="Text 6"/>
-          <p:cNvSpPr txBox="1"/>
-          <p:nvPr/>
-        </p:nvSpPr>
-        <p:spPr>
-          <a:xfrm>
-            <a:off x="4389120" y="2514600"/>
-            <a:ext cx="3429000" cy="320040"/>
-          </a:xfrm>
-          <a:prstGeom prst="rect">
-            <a:avLst/>
-          </a:prstGeom>
-          <a:noFill/>
-          <a:ln/>
-        </p:spPr>
-        <p:txBody>
-          <a:bodyPr wrap="square" lIns="0" tIns="0" rIns="0" bIns="0" rtlCol="0" anchor="t"/>
-          <a:lstStyle/>
-          <a:p>
-            <a:pPr indent="0" marL="0">
-              <a:lnSpc>
-                <a:spcPct val="110000"/>
-              </a:lnSpc>
-              <a:buNone/>
-            </a:pPr>
-            <a:r>
-              <a:rPr lang="en-US" sz="1300" dirty="0">
-                <a:solidFill>
-                  <a:schemeClr val="accent5"/>
-                </a:solidFill>
-              </a:rPr>
-              <a:t>대안, 교섭력</a:t>
-            </a:r>
-            <a:endParaRPr lang="en-US" sz="1300" dirty="0"/>
-          </a:p>
-        </p:txBody>
-      </p:sp>
-      <p:sp>
-        <p:nvSpPr>
-          <p:cNvPr id="9" name="Text 7"/>
-          <p:cNvSpPr txBox="1"/>
-          <p:nvPr/>
-        </p:nvSpPr>
-        <p:spPr>
-          <a:xfrm>
-            <a:off x="4389120" y="2852928"/>
-            <a:ext cx="3429000" cy="1051560"/>
-          </a:xfrm>
-          <a:prstGeom prst="rect">
-            <a:avLst/>
-          </a:prstGeom>
-          <a:noFill/>
-          <a:ln/>
-        </p:spPr>
-        <p:txBody>
-          <a:bodyPr wrap="square" lIns="0" tIns="0" rIns="0" bIns="0" rtlCol="0" anchor="t"/>
-          <a:lstStyle/>
-          <a:p>
-            <a:pPr indent="0" marL="0">
-              <a:lnSpc>
-                <a:spcPct val="115000"/>
-              </a:lnSpc>
-              <a:buNone/>
-            </a:pPr>
-            <a:r>
-              <a:rPr lang="en-US" sz="1700" dirty="0">
-                <a:solidFill>
-                  <a:schemeClr val="tx1"/>
-                </a:solidFill>
-              </a:rPr>
-              <a:t>거래 상대가 다른 곳으로 옮기기 어렵고, 조건을 좌우할 힘이 있는가?</a:t>
-            </a:r>
-            <a:endParaRPr lang="en-US" sz="1700" dirty="0"/>
-          </a:p>
-        </p:txBody>
-      </p:sp>
-      <p:sp>
-        <p:nvSpPr>
-          <p:cNvPr id="10" name="Text 8"/>
-          <p:cNvSpPr txBox="1"/>
-          <p:nvPr/>
-        </p:nvSpPr>
-        <p:spPr>
-          <a:xfrm>
-            <a:off x="4389120" y="3931920"/>
-            <a:ext cx="3429000" cy="685800"/>
-          </a:xfrm>
-          <a:prstGeom prst="rect">
-            <a:avLst/>
-          </a:prstGeom>
-          <a:noFill/>
-          <a:ln/>
-        </p:spPr>
-        <p:txBody>
-          <a:bodyPr wrap="square" lIns="0" tIns="0" rIns="0" bIns="0" rtlCol="0" anchor="t"/>
-          <a:lstStyle/>
-          <a:p>
-            <a:pPr indent="0" marL="0">
-              <a:lnSpc>
-                <a:spcPct val="110000"/>
-              </a:lnSpc>
-              <a:buNone/>
-            </a:pPr>
-            <a:r>
-              <a:rPr lang="en-US" sz="1400" dirty="0">
-                <a:solidFill>
-                  <a:schemeClr val="accent2"/>
-                </a:solidFill>
-              </a:rPr>
-              <a:t>→ 덩치(규모)만으로는 설명이 안 됨</a:t>
-            </a:r>
-            <a:endParaRPr lang="en-US" sz="1400" dirty="0"/>
-          </a:p>
-        </p:txBody>
-      </p:sp>
-      <p:sp>
-        <p:nvSpPr>
-          <p:cNvPr id="11" name="Text 9"/>
+          <p:cNvPr id="5" name="Text 3"/>
           <p:cNvSpPr/>
           <p:nvPr/>
         </p:nvSpPr>
@@ -9301,20 +8774,243 @@
                   <a:schemeClr val="bg1"/>
                 </a:solidFill>
               </a:rPr>
-              <a:t>3  </a:t>
-            </a:r>
-            <a:pPr algn="ctr" indent="0" marL="0">
-              <a:buNone/>
-            </a:pPr>
-            <a:r>
-              <a:rPr lang="en-US" sz="1900" b="1" dirty="0">
-                <a:solidFill>
-                  <a:schemeClr val="bg1"/>
-                </a:solidFill>
-              </a:rPr>
-              <a:t>문제 행위와 법적 판단</a:t>
+              <a:t>3  문제 행위와 법적 판단</a:t>
             </a:r>
             <a:endParaRPr lang="en-US" sz="1900" dirty="0"/>
+          </a:p>
+        </p:txBody>
+      </p:sp>
+      <p:sp>
+        <p:nvSpPr>
+          <p:cNvPr id="6" name="Text 4"/>
+          <p:cNvSpPr txBox="1"/>
+          <p:nvPr/>
+        </p:nvSpPr>
+        <p:spPr>
+          <a:xfrm>
+            <a:off x="594360" y="2514600"/>
+            <a:ext cx="3429000" cy="320040"/>
+          </a:xfrm>
+          <a:prstGeom prst="rect">
+            <a:avLst/>
+          </a:prstGeom>
+          <a:noFill/>
+          <a:ln/>
+        </p:spPr>
+        <p:txBody>
+          <a:bodyPr wrap="square" lIns="0" tIns="0" rIns="0" bIns="0" rtlCol="0" anchor="t"/>
+          <a:lstStyle/>
+          <a:p>
+            <a:pPr indent="0" marL="0">
+              <a:lnSpc>
+                <a:spcPct val="110000"/>
+              </a:lnSpc>
+              <a:buNone/>
+            </a:pPr>
+            <a:r>
+              <a:rPr lang="en-US" sz="1300" dirty="0">
+                <a:solidFill>
+                  <a:schemeClr val="accent5"/>
+                </a:solidFill>
+              </a:rPr>
+              <a:t>독점, 과점, 집중</a:t>
+            </a:r>
+            <a:endParaRPr lang="en-US" sz="1300" dirty="0"/>
+          </a:p>
+        </p:txBody>
+      </p:sp>
+      <p:sp>
+        <p:nvSpPr>
+          <p:cNvPr id="7" name="Text 5"/>
+          <p:cNvSpPr txBox="1"/>
+          <p:nvPr/>
+        </p:nvSpPr>
+        <p:spPr>
+          <a:xfrm>
+            <a:off x="594360" y="2852928"/>
+            <a:ext cx="3429000" cy="1051560"/>
+          </a:xfrm>
+          <a:prstGeom prst="rect">
+            <a:avLst/>
+          </a:prstGeom>
+          <a:noFill/>
+          <a:ln/>
+        </p:spPr>
+        <p:txBody>
+          <a:bodyPr wrap="square" lIns="0" tIns="0" rIns="0" bIns="0" rtlCol="0" anchor="t"/>
+          <a:lstStyle/>
+          <a:p>
+            <a:pPr indent="0" marL="0">
+              <a:lnSpc>
+                <a:spcPct val="115000"/>
+              </a:lnSpc>
+              <a:buNone/>
+            </a:pPr>
+            <a:r>
+              <a:rPr lang="en-US" sz="1700" dirty="0">
+                <a:solidFill>
+                  <a:schemeClr val="tx1"/>
+                </a:solidFill>
+              </a:rPr>
+              <a:t>어떤 시장에서 몇 개 사업자에게 거래가 몰리는가?</a:t>
+            </a:r>
+            <a:endParaRPr lang="en-US" sz="1700" dirty="0"/>
+          </a:p>
+        </p:txBody>
+      </p:sp>
+      <p:sp>
+        <p:nvSpPr>
+          <p:cNvPr id="8" name="Text 6"/>
+          <p:cNvSpPr txBox="1"/>
+          <p:nvPr/>
+        </p:nvSpPr>
+        <p:spPr>
+          <a:xfrm>
+            <a:off x="594360" y="3931920"/>
+            <a:ext cx="3429000" cy="685800"/>
+          </a:xfrm>
+          <a:prstGeom prst="rect">
+            <a:avLst/>
+          </a:prstGeom>
+          <a:noFill/>
+          <a:ln/>
+        </p:spPr>
+        <p:txBody>
+          <a:bodyPr wrap="square" lIns="0" tIns="0" rIns="0" bIns="0" rtlCol="0" anchor="t"/>
+          <a:lstStyle/>
+          <a:p>
+            <a:pPr indent="0" marL="0">
+              <a:lnSpc>
+                <a:spcPct val="110000"/>
+              </a:lnSpc>
+              <a:buNone/>
+            </a:pPr>
+            <a:r>
+              <a:rPr lang="en-US" sz="1400" dirty="0">
+                <a:solidFill>
+                  <a:schemeClr val="accent2"/>
+                </a:solidFill>
+              </a:rPr>
+              <a:t>→ 점유율은 시장 범위·지역·연도·산식까지 같이 봐야 함</a:t>
+            </a:r>
+            <a:endParaRPr lang="en-US" sz="1400" dirty="0"/>
+          </a:p>
+        </p:txBody>
+      </p:sp>
+      <p:sp>
+        <p:nvSpPr>
+          <p:cNvPr id="9" name="Text 7"/>
+          <p:cNvSpPr txBox="1"/>
+          <p:nvPr/>
+        </p:nvSpPr>
+        <p:spPr>
+          <a:xfrm>
+            <a:off x="4251960" y="2514600"/>
+            <a:ext cx="3429000" cy="320040"/>
+          </a:xfrm>
+          <a:prstGeom prst="rect">
+            <a:avLst/>
+          </a:prstGeom>
+          <a:noFill/>
+          <a:ln/>
+        </p:spPr>
+        <p:txBody>
+          <a:bodyPr wrap="square" lIns="0" tIns="0" rIns="0" bIns="0" rtlCol="0" anchor="t"/>
+          <a:lstStyle/>
+          <a:p>
+            <a:pPr indent="0" marL="0">
+              <a:lnSpc>
+                <a:spcPct val="110000"/>
+              </a:lnSpc>
+              <a:buNone/>
+            </a:pPr>
+            <a:r>
+              <a:rPr lang="en-US" sz="1300" dirty="0">
+                <a:solidFill>
+                  <a:schemeClr val="accent5"/>
+                </a:solidFill>
+              </a:rPr>
+              <a:t>대안, 교섭력</a:t>
+            </a:r>
+            <a:endParaRPr lang="en-US" sz="1300" dirty="0"/>
+          </a:p>
+        </p:txBody>
+      </p:sp>
+      <p:sp>
+        <p:nvSpPr>
+          <p:cNvPr id="10" name="Text 8"/>
+          <p:cNvSpPr txBox="1"/>
+          <p:nvPr/>
+        </p:nvSpPr>
+        <p:spPr>
+          <a:xfrm>
+            <a:off x="4251960" y="2852928"/>
+            <a:ext cx="3429000" cy="1051560"/>
+          </a:xfrm>
+          <a:prstGeom prst="rect">
+            <a:avLst/>
+          </a:prstGeom>
+          <a:noFill/>
+          <a:ln/>
+        </p:spPr>
+        <p:txBody>
+          <a:bodyPr wrap="square" lIns="0" tIns="0" rIns="0" bIns="0" rtlCol="0" anchor="t"/>
+          <a:lstStyle/>
+          <a:p>
+            <a:pPr indent="0" marL="0">
+              <a:lnSpc>
+                <a:spcPct val="115000"/>
+              </a:lnSpc>
+              <a:buNone/>
+            </a:pPr>
+            <a:r>
+              <a:rPr lang="en-US" sz="1700" dirty="0">
+                <a:solidFill>
+                  <a:schemeClr val="tx1"/>
+                </a:solidFill>
+              </a:rPr>
+              <a:t>거래 상대가 다른 곳으로 옮기기 어렵고, 조건을 좌우할 힘이 있는가?</a:t>
+            </a:r>
+            <a:endParaRPr lang="en-US" sz="1700" dirty="0"/>
+          </a:p>
+        </p:txBody>
+      </p:sp>
+      <p:sp>
+        <p:nvSpPr>
+          <p:cNvPr id="11" name="Text 9"/>
+          <p:cNvSpPr txBox="1"/>
+          <p:nvPr/>
+        </p:nvSpPr>
+        <p:spPr>
+          <a:xfrm>
+            <a:off x="4251960" y="3931920"/>
+            <a:ext cx="3429000" cy="685800"/>
+          </a:xfrm>
+          <a:prstGeom prst="rect">
+            <a:avLst/>
+          </a:prstGeom>
+          <a:noFill/>
+          <a:ln/>
+        </p:spPr>
+        <p:txBody>
+          <a:bodyPr wrap="square" lIns="0" tIns="0" rIns="0" bIns="0" rtlCol="0" anchor="t"/>
+          <a:lstStyle/>
+          <a:p>
+            <a:pPr indent="0" marL="0">
+              <a:lnSpc>
+                <a:spcPct val="110000"/>
+              </a:lnSpc>
+              <a:buNone/>
+            </a:pPr>
+            <a:r>
+              <a:rPr lang="en-US" sz="1400" dirty="0">
+                <a:solidFill>
+                  <a:schemeClr val="accent2"/>
+                </a:solidFill>
+              </a:rPr>
+              <a:t>→ 덩치(규모)만으로는 설명이 안 됨</a:t>
+            </a:r>
+            <a:endParaRPr lang="en-US" sz="1400" dirty="0"/>
           </a:p>
         </p:txBody>
       </p:sp>
@@ -9326,7 +9022,7 @@
         </p:nvSpPr>
         <p:spPr>
           <a:xfrm>
-            <a:off x="8183880" y="2514600"/>
+            <a:off x="7909560" y="2514600"/>
             <a:ext cx="3429000" cy="320040"/>
           </a:xfrm>
           <a:prstGeom prst="rect">
@@ -9365,7 +9061,7 @@
         </p:nvSpPr>
         <p:spPr>
           <a:xfrm>
-            <a:off x="8183880" y="2852928"/>
+            <a:off x="7909560" y="2852928"/>
             <a:ext cx="3429000" cy="1051560"/>
           </a:xfrm>
           <a:prstGeom prst="rect">
@@ -9404,7 +9100,7 @@
         </p:nvSpPr>
         <p:spPr>
           <a:xfrm>
-            <a:off x="8183880" y="3931920"/>
+            <a:off x="7909560" y="3931920"/>
             <a:ext cx="3429000" cy="685800"/>
           </a:xfrm>
           <a:prstGeom prst="rect">
@@ -9488,7 +9184,7 @@
                   <a:schemeClr val="tx1"/>
                 </a:solidFill>
               </a:rPr>
-              <a:t>플랫폼이 크다는 사실만으로 불법 독점이라고 볼 수는 없음</a:t>
+              <a:t>덩치가 크다는 것과 불법 독점은 따로 따져야 함</a:t>
             </a:r>
             <a:endParaRPr lang="en-US" sz="2000" dirty="0"/>
           </a:p>
@@ -9596,7 +9292,7 @@
                   <a:schemeClr val="tx1"/>
                 </a:solidFill>
               </a:rPr>
-              <a:t>배달 주문 한 건에 얽힌 사람들</a:t>
+              <a:t>배달 주문 한 건에 얽힌 주체들</a:t>
             </a:r>
             <a:endParaRPr lang="en-US" sz="2800" dirty="0"/>
           </a:p>
@@ -9610,7 +9306,7 @@
         </p:nvSpPr>
         <p:spPr>
           <a:xfrm>
-            <a:off x="548640" y="1600200"/>
+            <a:off x="548640" y="1554480"/>
             <a:ext cx="2286000" cy="868680"/>
           </a:xfrm>
           <a:prstGeom prst="rect">
@@ -9630,7 +9326,7 @@
         </p:nvSpPr>
         <p:spPr>
           <a:xfrm>
-            <a:off x="548640" y="1600200"/>
+            <a:off x="548640" y="1554480"/>
             <a:ext cx="2286000" cy="868680"/>
           </a:xfrm>
           <a:prstGeom prst="rect">
@@ -9669,7 +9365,7 @@
         </p:nvSpPr>
         <p:spPr>
           <a:xfrm>
-            <a:off x="4709160" y="1600200"/>
+            <a:off x="4709160" y="1554480"/>
             <a:ext cx="2743200" cy="868680"/>
           </a:xfrm>
           <a:prstGeom prst="rect">
@@ -9689,7 +9385,7 @@
         </p:nvSpPr>
         <p:spPr>
           <a:xfrm>
-            <a:off x="4709160" y="1600200"/>
+            <a:off x="4709160" y="1554480"/>
             <a:ext cx="2743200" cy="868680"/>
           </a:xfrm>
           <a:prstGeom prst="rect">
@@ -9731,7 +9427,7 @@
                   <a:schemeClr val="bg1"/>
                 </a:solidFill>
               </a:rPr>
-              <a:t>결제·정산, 배달 운영</a:t>
+              <a:t>결제·정산</a:t>
             </a:r>
             <a:endParaRPr lang="en-US" sz="1600" dirty="0"/>
           </a:p>
@@ -9745,7 +9441,7 @@
         </p:nvSpPr>
         <p:spPr>
           <a:xfrm>
-            <a:off x="9354312" y="1600200"/>
+            <a:off x="9354312" y="1554480"/>
             <a:ext cx="2286000" cy="868680"/>
           </a:xfrm>
           <a:prstGeom prst="rect">
@@ -9765,7 +9461,7 @@
         </p:nvSpPr>
         <p:spPr>
           <a:xfrm>
-            <a:off x="9354312" y="1600200"/>
+            <a:off x="9354312" y="1554480"/>
             <a:ext cx="2286000" cy="868680"/>
           </a:xfrm>
           <a:prstGeom prst="rect">
@@ -9791,6 +9487,23 @@
                 </a:solidFill>
               </a:rPr>
               <a:t>식당 / 입점 마트</a:t>
+            </a:r>
+            <a:endParaRPr lang="en-US" sz="1600" dirty="0"/>
+          </a:p>
+          <a:p>
+            <a:pPr algn="ctr" indent="0" marL="0">
+              <a:lnSpc>
+                <a:spcPct val="110000"/>
+              </a:lnSpc>
+              <a:buNone/>
+            </a:pPr>
+            <a:r>
+              <a:rPr lang="en-US" sz="1300" dirty="0">
+                <a:solidFill>
+                  <a:schemeClr val="tx1"/>
+                </a:solidFill>
+              </a:rPr>
+              <a:t>음식은 식당, 장보기는 마트</a:t>
             </a:r>
             <a:endParaRPr lang="en-US" sz="1600" dirty="0"/>
           </a:p>
@@ -9804,66 +9517,7 @@
         </p:nvSpPr>
         <p:spPr>
           <a:xfrm>
-            <a:off x="4709160" y="3246120"/>
-            <a:ext cx="2743200" cy="731520"/>
-          </a:xfrm>
-          <a:prstGeom prst="rect">
-            <a:avLst/>
-          </a:prstGeom>
-          <a:solidFill>
-            <a:schemeClr val="bg2"/>
-          </a:solidFill>
-          <a:ln/>
-        </p:spPr>
-      </p:sp>
-      <p:sp>
-        <p:nvSpPr>
-          <p:cNvPr id="10" name="Text 8"/>
-          <p:cNvSpPr txBox="1"/>
-          <p:nvPr/>
-        </p:nvSpPr>
-        <p:spPr>
-          <a:xfrm>
-            <a:off x="4709160" y="3246120"/>
-            <a:ext cx="2743200" cy="731520"/>
-          </a:xfrm>
-          <a:prstGeom prst="rect">
-            <a:avLst/>
-          </a:prstGeom>
-          <a:noFill/>
-          <a:ln/>
-        </p:spPr>
-        <p:txBody>
-          <a:bodyPr wrap="square" lIns="0" tIns="0" rIns="0" bIns="0" rtlCol="0" anchor="ctr"/>
-          <a:lstStyle/>
-          <a:p>
-            <a:pPr algn="ctr" indent="0" marL="0">
-              <a:lnSpc>
-                <a:spcPct val="110000"/>
-              </a:lnSpc>
-              <a:buNone/>
-            </a:pPr>
-            <a:r>
-              <a:rPr lang="en-US" sz="1900" b="1" dirty="0">
-                <a:solidFill>
-                  <a:schemeClr val="tx1"/>
-                </a:solidFill>
-              </a:rPr>
-              <a:t>라이더</a:t>
-            </a:r>
-            <a:endParaRPr lang="en-US" sz="1600" dirty="0"/>
-          </a:p>
-        </p:txBody>
-      </p:sp>
-      <p:sp>
-        <p:nvSpPr>
-          <p:cNvPr id="11" name="Shape 9"/>
-          <p:cNvSpPr/>
-          <p:nvPr/>
-        </p:nvSpPr>
-        <p:spPr>
-          <a:xfrm>
-            <a:off x="2880360" y="2034540"/>
+            <a:off x="2880360" y="1988820"/>
             <a:ext cx="1783080" cy="0"/>
           </a:xfrm>
           <a:prstGeom prst="line">
@@ -9881,13 +9535,13 @@
       </p:sp>
       <p:sp>
         <p:nvSpPr>
-          <p:cNvPr id="12" name="Text 10"/>
+          <p:cNvPr id="10" name="Text 8"/>
           <p:cNvSpPr txBox="1"/>
           <p:nvPr/>
         </p:nvSpPr>
         <p:spPr>
           <a:xfrm>
-            <a:off x="2880360" y="1572768"/>
+            <a:off x="2880360" y="1527048"/>
             <a:ext cx="1783080" cy="365760"/>
           </a:xfrm>
           <a:prstGeom prst="rect">
@@ -9920,13 +9574,13 @@
       </p:sp>
       <p:sp>
         <p:nvSpPr>
-          <p:cNvPr id="13" name="Shape 11"/>
+          <p:cNvPr id="11" name="Shape 9"/>
           <p:cNvSpPr/>
           <p:nvPr/>
         </p:nvSpPr>
         <p:spPr>
           <a:xfrm>
-            <a:off x="7498080" y="2034540"/>
+            <a:off x="7498080" y="1988820"/>
             <a:ext cx="1810512" cy="0"/>
           </a:xfrm>
           <a:prstGeom prst="line">
@@ -9944,23 +9598,82 @@
       </p:sp>
       <p:sp>
         <p:nvSpPr>
+          <p:cNvPr id="12" name="Text 10"/>
+          <p:cNvSpPr txBox="1"/>
+          <p:nvPr/>
+        </p:nvSpPr>
+        <p:spPr>
+          <a:xfrm>
+            <a:off x="7498080" y="1527048"/>
+            <a:ext cx="1810512" cy="365760"/>
+          </a:xfrm>
+          <a:prstGeom prst="rect">
+            <a:avLst/>
+          </a:prstGeom>
+          <a:noFill/>
+          <a:ln/>
+        </p:spPr>
+        <p:txBody>
+          <a:bodyPr wrap="square" lIns="0" tIns="0" rIns="0" bIns="0" rtlCol="0" anchor="t"/>
+          <a:lstStyle/>
+          <a:p>
+            <a:pPr algn="ctr" indent="0" marL="0">
+              <a:lnSpc>
+                <a:spcPct val="110000"/>
+              </a:lnSpc>
+              <a:buNone/>
+            </a:pPr>
+            <a:r>
+              <a:rPr lang="en-US" sz="1300" dirty="0">
+                <a:solidFill>
+                  <a:schemeClr val="accent5"/>
+                </a:solidFill>
+              </a:rPr>
+              <a:t>공제 후 정산</a:t>
+            </a:r>
+            <a:endParaRPr lang="en-US" sz="1300" dirty="0"/>
+          </a:p>
+        </p:txBody>
+      </p:sp>
+      <p:sp>
+        <p:nvSpPr>
+          <p:cNvPr id="13" name="Shape 11"/>
+          <p:cNvSpPr/>
+          <p:nvPr/>
+        </p:nvSpPr>
+        <p:spPr>
+          <a:xfrm>
+            <a:off x="4709160" y="2926080"/>
+            <a:ext cx="2743200" cy="777240"/>
+          </a:xfrm>
+          <a:prstGeom prst="rect">
+            <a:avLst/>
+          </a:prstGeom>
+          <a:solidFill>
+            <a:schemeClr val="bg2"/>
+          </a:solidFill>
+          <a:ln/>
+        </p:spPr>
+      </p:sp>
+      <p:sp>
+        <p:nvSpPr>
           <p:cNvPr id="14" name="Text 12"/>
           <p:cNvSpPr txBox="1"/>
           <p:nvPr/>
         </p:nvSpPr>
         <p:spPr>
           <a:xfrm>
-            <a:off x="7498080" y="1572768"/>
-            <a:ext cx="1810512" cy="365760"/>
-          </a:xfrm>
-          <a:prstGeom prst="rect">
-            <a:avLst/>
-          </a:prstGeom>
-          <a:noFill/>
-          <a:ln/>
-        </p:spPr>
-        <p:txBody>
-          <a:bodyPr wrap="square" lIns="0" tIns="0" rIns="0" bIns="0" rtlCol="0" anchor="t"/>
+            <a:off x="4709160" y="2926080"/>
+            <a:ext cx="2743200" cy="777240"/>
+          </a:xfrm>
+          <a:prstGeom prst="rect">
+            <a:avLst/>
+          </a:prstGeom>
+          <a:noFill/>
+          <a:ln/>
+        </p:spPr>
+        <p:txBody>
+          <a:bodyPr wrap="square" lIns="0" tIns="0" rIns="0" bIns="0" rtlCol="0" anchor="ctr"/>
           <a:lstStyle/>
           <a:p>
             <a:pPr algn="ctr" indent="0" marL="0">
@@ -9970,14 +9683,14 @@
               <a:buNone/>
             </a:pPr>
             <a:r>
-              <a:rPr lang="en-US" sz="1300" dirty="0">
-                <a:solidFill>
-                  <a:schemeClr val="accent5"/>
-                </a:solidFill>
-              </a:rPr>
-              <a:t>공제 후 정산</a:t>
-            </a:r>
-            <a:endParaRPr lang="en-US" sz="1300" dirty="0"/>
+              <a:rPr lang="en-US" sz="1900" b="1" dirty="0">
+                <a:solidFill>
+                  <a:schemeClr val="tx1"/>
+                </a:solidFill>
+              </a:rPr>
+              <a:t>배달 운영 주체</a:t>
+            </a:r>
+            <a:endParaRPr lang="en-US" sz="1600" dirty="0"/>
           </a:p>
         </p:txBody>
       </p:sp>
@@ -9989,8 +9702,67 @@
         </p:nvSpPr>
         <p:spPr>
           <a:xfrm>
-            <a:off x="6080760" y="2514600"/>
-            <a:ext cx="0" cy="685800"/>
+            <a:off x="9354312" y="2926080"/>
+            <a:ext cx="2286000" cy="777240"/>
+          </a:xfrm>
+          <a:prstGeom prst="rect">
+            <a:avLst/>
+          </a:prstGeom>
+          <a:solidFill>
+            <a:schemeClr val="bg2"/>
+          </a:solidFill>
+          <a:ln/>
+        </p:spPr>
+      </p:sp>
+      <p:sp>
+        <p:nvSpPr>
+          <p:cNvPr id="16" name="Text 14"/>
+          <p:cNvSpPr txBox="1"/>
+          <p:nvPr/>
+        </p:nvSpPr>
+        <p:spPr>
+          <a:xfrm>
+            <a:off x="9354312" y="2926080"/>
+            <a:ext cx="2286000" cy="777240"/>
+          </a:xfrm>
+          <a:prstGeom prst="rect">
+            <a:avLst/>
+          </a:prstGeom>
+          <a:noFill/>
+          <a:ln/>
+        </p:spPr>
+        <p:txBody>
+          <a:bodyPr wrap="square" lIns="0" tIns="0" rIns="0" bIns="0" rtlCol="0" anchor="ctr"/>
+          <a:lstStyle/>
+          <a:p>
+            <a:pPr algn="ctr" indent="0" marL="0">
+              <a:lnSpc>
+                <a:spcPct val="110000"/>
+              </a:lnSpc>
+              <a:buNone/>
+            </a:pPr>
+            <a:r>
+              <a:rPr lang="en-US" sz="1900" b="1" dirty="0">
+                <a:solidFill>
+                  <a:schemeClr val="tx1"/>
+                </a:solidFill>
+              </a:rPr>
+              <a:t>라이더</a:t>
+            </a:r>
+            <a:endParaRPr lang="en-US" sz="1600" dirty="0"/>
+          </a:p>
+        </p:txBody>
+      </p:sp>
+      <p:sp>
+        <p:nvSpPr>
+          <p:cNvPr id="17" name="Shape 15"/>
+          <p:cNvSpPr/>
+          <p:nvPr/>
+        </p:nvSpPr>
+        <p:spPr>
+          <a:xfrm>
+            <a:off x="7498080" y="3314700"/>
+            <a:ext cx="1810512" cy="0"/>
           </a:xfrm>
           <a:prstGeom prst="line">
             <a:avLst/>
@@ -10007,125 +9779,125 @@
       </p:sp>
       <p:sp>
         <p:nvSpPr>
-          <p:cNvPr id="16" name="Text 14"/>
-          <p:cNvSpPr txBox="1"/>
-          <p:nvPr/>
-        </p:nvSpPr>
-        <p:spPr>
-          <a:xfrm>
-            <a:off x="6263640" y="2542032"/>
-            <a:ext cx="2926080" cy="640080"/>
-          </a:xfrm>
-          <a:prstGeom prst="rect">
-            <a:avLst/>
-          </a:prstGeom>
-          <a:noFill/>
-          <a:ln/>
-        </p:spPr>
-        <p:txBody>
-          <a:bodyPr wrap="square" lIns="0" tIns="0" rIns="0" bIns="0" rtlCol="0" anchor="ctr"/>
-          <a:lstStyle/>
-          <a:p>
-            <a:pPr indent="0" marL="0">
-              <a:lnSpc>
-                <a:spcPct val="110000"/>
-              </a:lnSpc>
-              <a:buNone/>
-            </a:pPr>
-            <a:r>
-              <a:rPr lang="en-US" sz="1300" dirty="0">
-                <a:solidFill>
-                  <a:schemeClr val="accent5"/>
-                </a:solidFill>
-              </a:rPr>
-              <a:t>조건별 배달 보수</a:t>
-            </a:r>
-            <a:endParaRPr lang="en-US" sz="1300" dirty="0"/>
-          </a:p>
-          <a:p>
-            <a:pPr indent="0" marL="0">
-              <a:lnSpc>
-                <a:spcPct val="110000"/>
-              </a:lnSpc>
-              <a:buNone/>
-            </a:pPr>
-            <a:r>
-              <a:rPr lang="en-US" sz="1300" dirty="0">
-                <a:solidFill>
-                  <a:schemeClr val="accent5"/>
-                </a:solidFill>
-              </a:rPr>
-              <a:t>(소비자가 낸 배달팁과 별개)</a:t>
-            </a:r>
-            <a:endParaRPr lang="en-US" sz="1300" dirty="0"/>
-          </a:p>
-        </p:txBody>
-      </p:sp>
-      <p:sp>
-        <p:nvSpPr>
-          <p:cNvPr id="17" name="Text 15"/>
-          <p:cNvSpPr txBox="1"/>
-          <p:nvPr/>
-        </p:nvSpPr>
-        <p:spPr>
-          <a:xfrm>
-            <a:off x="9354312" y="2560320"/>
-            <a:ext cx="2286000" cy="594360"/>
-          </a:xfrm>
-          <a:prstGeom prst="rect">
-            <a:avLst/>
-          </a:prstGeom>
-          <a:noFill/>
-          <a:ln/>
-        </p:spPr>
-        <p:txBody>
-          <a:bodyPr wrap="square" lIns="0" tIns="0" rIns="0" bIns="0" rtlCol="0" anchor="t"/>
-          <a:lstStyle/>
-          <a:p>
-            <a:pPr algn="ctr" indent="0" marL="0">
-              <a:lnSpc>
-                <a:spcPct val="110000"/>
-              </a:lnSpc>
-              <a:buNone/>
-            </a:pPr>
-            <a:r>
-              <a:rPr lang="en-US" sz="1300" dirty="0">
-                <a:solidFill>
-                  <a:schemeClr val="accent5"/>
-                </a:solidFill>
-              </a:rPr>
-              <a:t>음식 주문은 식당,</a:t>
-            </a:r>
-            <a:endParaRPr lang="en-US" sz="1300" dirty="0"/>
-          </a:p>
-          <a:p>
-            <a:pPr algn="ctr" indent="0" marL="0">
-              <a:lnSpc>
-                <a:spcPct val="110000"/>
-              </a:lnSpc>
-              <a:buNone/>
-            </a:pPr>
-            <a:r>
-              <a:rPr lang="en-US" sz="1300" dirty="0">
-                <a:solidFill>
-                  <a:schemeClr val="accent5"/>
-                </a:solidFill>
-              </a:rPr>
-              <a:t>장보기 주문은 입점 마트</a:t>
-            </a:r>
-            <a:endParaRPr lang="en-US" sz="1300" dirty="0"/>
-          </a:p>
-        </p:txBody>
-      </p:sp>
-      <p:sp>
-        <p:nvSpPr>
           <p:cNvPr id="18" name="Text 16"/>
           <p:cNvSpPr txBox="1"/>
           <p:nvPr/>
         </p:nvSpPr>
         <p:spPr>
           <a:xfrm>
-            <a:off x="548640" y="4343400"/>
+            <a:off x="7498080" y="2606040"/>
+            <a:ext cx="1810512" cy="594360"/>
+          </a:xfrm>
+          <a:prstGeom prst="rect">
+            <a:avLst/>
+          </a:prstGeom>
+          <a:noFill/>
+          <a:ln/>
+        </p:spPr>
+        <p:txBody>
+          <a:bodyPr wrap="square" lIns="0" tIns="0" rIns="0" bIns="0" rtlCol="0" anchor="b"/>
+          <a:lstStyle/>
+          <a:p>
+            <a:pPr algn="ctr" indent="0" marL="0">
+              <a:lnSpc>
+                <a:spcPct val="110000"/>
+              </a:lnSpc>
+              <a:buNone/>
+            </a:pPr>
+            <a:r>
+              <a:rPr lang="en-US" sz="1250" dirty="0">
+                <a:solidFill>
+                  <a:schemeClr val="accent5"/>
+                </a:solidFill>
+              </a:rPr>
+              <a:t>조건별 배달 보수</a:t>
+            </a:r>
+            <a:endParaRPr lang="en-US" sz="1250" dirty="0"/>
+          </a:p>
+          <a:p>
+            <a:pPr algn="ctr" indent="0" marL="0">
+              <a:lnSpc>
+                <a:spcPct val="110000"/>
+              </a:lnSpc>
+              <a:buNone/>
+            </a:pPr>
+            <a:r>
+              <a:rPr lang="en-US" sz="1250" dirty="0">
+                <a:solidFill>
+                  <a:schemeClr val="accent5"/>
+                </a:solidFill>
+              </a:rPr>
+              <a:t>(배달팁과는 별개)</a:t>
+            </a:r>
+            <a:endParaRPr lang="en-US" sz="1250" dirty="0"/>
+          </a:p>
+        </p:txBody>
+      </p:sp>
+      <p:sp>
+        <p:nvSpPr>
+          <p:cNvPr id="19" name="Text 17"/>
+          <p:cNvSpPr txBox="1"/>
+          <p:nvPr/>
+        </p:nvSpPr>
+        <p:spPr>
+          <a:xfrm>
+            <a:off x="548640" y="2926080"/>
+            <a:ext cx="3977640" cy="777240"/>
+          </a:xfrm>
+          <a:prstGeom prst="rect">
+            <a:avLst/>
+          </a:prstGeom>
+          <a:noFill/>
+          <a:ln/>
+        </p:spPr>
+        <p:txBody>
+          <a:bodyPr wrap="square" lIns="0" tIns="0" rIns="0" bIns="0" rtlCol="0" anchor="ctr"/>
+          <a:lstStyle/>
+          <a:p>
+            <a:pPr algn="r" indent="0" marL="0">
+              <a:lnSpc>
+                <a:spcPct val="110000"/>
+              </a:lnSpc>
+              <a:buNone/>
+            </a:pPr>
+            <a:r>
+              <a:rPr lang="en-US" sz="1300" dirty="0">
+                <a:solidFill>
+                  <a:schemeClr val="accent5"/>
+                </a:solidFill>
+              </a:rPr>
+              <a:t>배민배달은 배민 측,</a:t>
+            </a:r>
+            <a:endParaRPr lang="en-US" sz="1300" dirty="0"/>
+          </a:p>
+          <a:p>
+            <a:pPr algn="r" indent="0" marL="0">
+              <a:lnSpc>
+                <a:spcPct val="110000"/>
+              </a:lnSpc>
+              <a:buNone/>
+            </a:pPr>
+            <a:r>
+              <a:rPr lang="en-US" sz="1300" dirty="0">
+                <a:solidFill>
+                  <a:schemeClr val="accent5"/>
+                </a:solidFill>
+              </a:rPr>
+              <a:t>가게배달은 식당이나 대행업체</a:t>
+            </a:r>
+            <a:endParaRPr lang="en-US" sz="1300" dirty="0"/>
+          </a:p>
+        </p:txBody>
+      </p:sp>
+      <p:sp>
+        <p:nvSpPr>
+          <p:cNvPr id="20" name="Text 18"/>
+          <p:cNvSpPr txBox="1"/>
+          <p:nvPr/>
+        </p:nvSpPr>
+        <p:spPr>
+          <a:xfrm>
+            <a:off x="548640" y="4297680"/>
             <a:ext cx="5486400" cy="365760"/>
           </a:xfrm>
           <a:prstGeom prst="rect">
@@ -10158,13 +9930,13 @@
       </p:sp>
       <p:sp>
         <p:nvSpPr>
-          <p:cNvPr id="19" name="Shape 17"/>
+          <p:cNvPr id="21" name="Shape 19"/>
           <p:cNvSpPr/>
           <p:nvPr/>
         </p:nvSpPr>
         <p:spPr>
           <a:xfrm>
-            <a:off x="548640" y="4754880"/>
+            <a:off x="548640" y="4709160"/>
             <a:ext cx="2636444" cy="1188720"/>
           </a:xfrm>
           <a:prstGeom prst="rect">
@@ -10178,13 +9950,13 @@
       </p:sp>
       <p:sp>
         <p:nvSpPr>
-          <p:cNvPr id="20" name="Text 18"/>
+          <p:cNvPr id="22" name="Text 20"/>
           <p:cNvSpPr txBox="1"/>
           <p:nvPr/>
         </p:nvSpPr>
         <p:spPr>
           <a:xfrm>
-            <a:off x="731520" y="4864608"/>
+            <a:off x="731520" y="4818888"/>
             <a:ext cx="2270684" cy="1005840"/>
           </a:xfrm>
           <a:prstGeom prst="rect">
@@ -10234,13 +10006,13 @@
       </p:sp>
       <p:sp>
         <p:nvSpPr>
-          <p:cNvPr id="21" name="Shape 19"/>
+          <p:cNvPr id="23" name="Shape 21"/>
           <p:cNvSpPr/>
           <p:nvPr/>
         </p:nvSpPr>
         <p:spPr>
           <a:xfrm>
-            <a:off x="3367964" y="4754880"/>
+            <a:off x="3367964" y="4709160"/>
             <a:ext cx="2636444" cy="1188720"/>
           </a:xfrm>
           <a:prstGeom prst="rect">
@@ -10254,13 +10026,13 @@
       </p:sp>
       <p:sp>
         <p:nvSpPr>
-          <p:cNvPr id="22" name="Text 20"/>
+          <p:cNvPr id="24" name="Text 22"/>
           <p:cNvSpPr txBox="1"/>
           <p:nvPr/>
         </p:nvSpPr>
         <p:spPr>
           <a:xfrm>
-            <a:off x="3550844" y="4864608"/>
+            <a:off x="3550844" y="4818888"/>
             <a:ext cx="2270684" cy="1005840"/>
           </a:xfrm>
           <a:prstGeom prst="rect">
@@ -10310,13 +10082,13 @@
       </p:sp>
       <p:sp>
         <p:nvSpPr>
-          <p:cNvPr id="23" name="Shape 21"/>
+          <p:cNvPr id="25" name="Shape 23"/>
           <p:cNvSpPr/>
           <p:nvPr/>
         </p:nvSpPr>
         <p:spPr>
           <a:xfrm>
-            <a:off x="6187288" y="4754880"/>
+            <a:off x="6187288" y="4709160"/>
             <a:ext cx="2636444" cy="1188720"/>
           </a:xfrm>
           <a:prstGeom prst="rect">
@@ -10330,13 +10102,13 @@
       </p:sp>
       <p:sp>
         <p:nvSpPr>
-          <p:cNvPr id="24" name="Text 22"/>
+          <p:cNvPr id="26" name="Text 24"/>
           <p:cNvSpPr txBox="1"/>
           <p:nvPr/>
         </p:nvSpPr>
         <p:spPr>
           <a:xfrm>
-            <a:off x="6370168" y="4864608"/>
+            <a:off x="6370168" y="4818888"/>
             <a:ext cx="2270684" cy="1005840"/>
           </a:xfrm>
           <a:prstGeom prst="rect">
@@ -10386,13 +10158,13 @@
       </p:sp>
       <p:sp>
         <p:nvSpPr>
-          <p:cNvPr id="25" name="Shape 23"/>
+          <p:cNvPr id="27" name="Shape 25"/>
           <p:cNvSpPr/>
           <p:nvPr/>
         </p:nvSpPr>
         <p:spPr>
           <a:xfrm>
-            <a:off x="9006611" y="4754880"/>
+            <a:off x="9006611" y="4709160"/>
             <a:ext cx="2636444" cy="1188720"/>
           </a:xfrm>
           <a:prstGeom prst="rect">
@@ -10406,13 +10178,13 @@
       </p:sp>
       <p:sp>
         <p:nvSpPr>
-          <p:cNvPr id="26" name="Text 24"/>
+          <p:cNvPr id="28" name="Text 26"/>
           <p:cNvSpPr txBox="1"/>
           <p:nvPr/>
         </p:nvSpPr>
         <p:spPr>
           <a:xfrm>
-            <a:off x="9189491" y="4864608"/>
+            <a:off x="9189491" y="4818888"/>
             <a:ext cx="2270684" cy="1005840"/>
           </a:xfrm>
           <a:prstGeom prst="rect">
@@ -10462,7 +10234,7 @@
       </p:sp>
       <p:sp>
         <p:nvSpPr>
-          <p:cNvPr id="27" name="Text 25"/>
+          <p:cNvPr id="29" name="Text 27"/>
           <p:cNvSpPr txBox="1"/>
           <p:nvPr/>
         </p:nvSpPr>
@@ -10493,7 +10265,7 @@
                   <a:schemeClr val="accent5"/>
                 </a:solidFill>
               </a:rPr>
-              <a:t>출처: 배민 공식 안내(정산, 배민스토어), 우아한청년들 발표(2025.1.24.), 배민커넥트 안내  |  계약·지급 주체는 서비스마다 다름</a:t>
+              <a:t>출처: 배민 공식 안내(정산, 배민스토어), 우아한청년들 발표(2025.1.24.), 배민커넥트 안내</a:t>
             </a:r>
             <a:endParaRPr lang="en-US" sz="1000" dirty="0"/>
           </a:p>
@@ -10601,7 +10373,7 @@
                   <a:schemeClr val="tx1"/>
                 </a:solidFill>
               </a:rPr>
-              <a:t>같은 배달앱이라도 방식마다 돈 흐름이 다름</a:t>
+              <a:t>배달 방식별 돈의 흐름</a:t>
             </a:r>
             <a:endParaRPr lang="en-US" sz="2800" dirty="0"/>
           </a:p>
@@ -10701,7 +10473,7 @@
                             <a:schemeClr val="bg1"/>
                           </a:solidFill>
                         </a:rPr>
-                        <a:t>중개: 연결해 주고 수수료를 받음</a:t>
+                        <a:t>중개: 연결하고 수수료를 받음</a:t>
                       </a:r>
                       <a:endParaRPr lang="en-US" sz="1400" dirty="0"/>
                     </a:p>
@@ -10768,7 +10540,7 @@
                             <a:schemeClr val="bg1"/>
                           </a:solidFill>
                         </a:rPr>
-                        <a:t>직접 판매: 사서 팖</a:t>
+                        <a:t>직접 판매: 사들여서 판매</a:t>
                       </a:r>
                       <a:endParaRPr lang="en-US" sz="1400" dirty="0"/>
                     </a:p>
@@ -11710,7 +11482,7 @@
                   </a:tcPr>
                 </a:tc>
               </a:tr>
-              <a:tr h="777240">
+              <a:tr h="685800">
                 <a:tc>
                   <a:txBody>
                     <a:bodyPr/>
@@ -11725,7 +11497,7 @@
                             <a:schemeClr val="accent5"/>
                           </a:solidFill>
                         </a:rPr>
-                        <a:t>주의할 점</a:t>
+                        <a:t>고객 배달팁</a:t>
                       </a:r>
                       <a:endParaRPr lang="en-US" sz="1400" dirty="0"/>
                     </a:p>
@@ -11783,7 +11555,7 @@
                             <a:schemeClr val="tx1"/>
                           </a:solidFill>
                         </a:rPr>
-                        <a:t>고객 배달팁은 배민 매출</a:t>
+                        <a:t>배민 매출</a:t>
                       </a:r>
                       <a:endParaRPr lang="en-US" sz="1500" dirty="0"/>
                     </a:p>
@@ -11841,7 +11613,7 @@
                             <a:schemeClr val="tx1"/>
                           </a:solidFill>
                         </a:rPr>
-                        <a:t>고객 배달팁은 점주 매출</a:t>
+                        <a:t>점주 매출</a:t>
                       </a:r>
                       <a:endParaRPr lang="en-US" sz="1500" dirty="0"/>
                     </a:p>
@@ -11899,7 +11671,7 @@
                             <a:schemeClr val="tx1"/>
                           </a:solidFill>
                         </a:rPr>
-                        <a:t>음식배달 요율을 그대로 적용 못 함</a:t>
+                        <a:t>음식배달 요율과 계산 방식이 다름</a:t>
                       </a:r>
                       <a:endParaRPr lang="en-US" sz="1500" dirty="0"/>
                     </a:p>
@@ -12054,14 +11826,14 @@
               <a:buNone/>
             </a:pPr>
             <a:r>
-              <a:rPr lang="en-US" sz="1700" b="1" dirty="0">
+              <a:rPr lang="en-US" sz="1800" b="1" dirty="0">
                 <a:solidFill>
                   <a:schemeClr val="tx1"/>
                 </a:solidFill>
               </a:rPr>
-              <a:t>업주 배달비, 고객 배달팁, 라이더 보수는 서로 다른 항목이라 하나로 합쳐서 계산하면 안 됨</a:t>
-            </a:r>
-            <a:endParaRPr lang="en-US" sz="1700" dirty="0"/>
+              <a:t>업주 배달비, 고객 배달팁, 라이더 보수는 서로 다른 돈</a:t>
+            </a:r>
+            <a:endParaRPr lang="en-US" sz="1800" dirty="0"/>
           </a:p>
         </p:txBody>
       </p:sp>
@@ -12098,7 +11870,7 @@
                   <a:schemeClr val="accent5"/>
                 </a:solidFill>
               </a:rPr>
-              <a:t>출처: 배민 공식 안내(배민배달, 가게배달, 부가세 신고자료, 배민스토어 정산), B마트는 전자신문(2026.7.) 기사 기준  |  요율은 부가세 별도, 2026.10.1. 조회</a:t>
+              <a:t>출처: 배민 공식 안내(배민배달, 가게배달, 부가세 신고자료, 배민스토어 정산), 전자신문(2026.7.)  |  요율은 부가세 별도</a:t>
             </a:r>
             <a:endParaRPr lang="en-US" sz="1000" dirty="0"/>
           </a:p>
@@ -12206,7 +11978,7 @@
                   <a:schemeClr val="tx1"/>
                 </a:solidFill>
               </a:rPr>
-              <a:t>서울에서 2만 원 주문하면, 식당 정산액은 13,884원</a:t>
+              <a:t>서울 2만 원 주문 예시: 식당 정산액 13,884원</a:t>
             </a:r>
             <a:endParaRPr lang="en-US" sz="2800" dirty="0"/>
           </a:p>
@@ -12767,7 +12539,7 @@
         <p:spPr>
           <a:xfrm>
             <a:off x="868680" y="4663440"/>
-            <a:ext cx="2926080" cy="384048"/>
+            <a:ext cx="3108960" cy="384048"/>
           </a:xfrm>
           <a:prstGeom prst="rect">
             <a:avLst/>
@@ -12791,7 +12563,7 @@
                   <a:schemeClr val="accent5"/>
                 </a:solidFill>
               </a:rPr>
-              <a:t>총 공제 (30.58%)</a:t>
+              <a:t>빠지는 돈 합계 (30.58%)</a:t>
             </a:r>
             <a:endParaRPr lang="en-US" sz="1600" dirty="0"/>
           </a:p>
@@ -12947,7 +12719,7 @@
                   <a:schemeClr val="tx1"/>
                 </a:solidFill>
               </a:rPr>
-              <a:t>13,884원은 순이익이 아님</a:t>
+              <a:t>13,884원에서 또 나가는 돈</a:t>
             </a:r>
             <a:endParaRPr lang="en-US" sz="1900" dirty="0"/>
           </a:p>
@@ -12962,7 +12734,7 @@
         <p:spPr>
           <a:xfrm>
             <a:off x="6172200" y="1892808"/>
-            <a:ext cx="5470855" cy="411480"/>
+            <a:ext cx="5470855" cy="685800"/>
           </a:xfrm>
           <a:prstGeom prst="rect">
             <a:avLst/>
@@ -12976,7 +12748,7 @@
           <a:p>
             <a:pPr indent="0" marL="0">
               <a:lnSpc>
-                <a:spcPct val="110000"/>
+                <a:spcPct val="115000"/>
               </a:lnSpc>
               <a:buNone/>
             </a:pPr>
@@ -12986,7 +12758,7 @@
                   <a:schemeClr val="tx1"/>
                 </a:solidFill>
               </a:rPr>
-              <a:t>식재료·포장·인건비·임차료는 정산 후에도 식당 부담</a:t>
+              <a:t>식재료, 포장, 인건비, 임차료는 정산 후에도 식당이 부담</a:t>
             </a:r>
             <a:endParaRPr lang="en-US" sz="1500" dirty="0"/>
           </a:p>
@@ -13000,7 +12772,7 @@
         </p:nvSpPr>
         <p:spPr>
           <a:xfrm>
-            <a:off x="6172200" y="2404872"/>
+            <a:off x="6172200" y="2697480"/>
             <a:ext cx="5470855" cy="0"/>
           </a:xfrm>
           <a:prstGeom prst="line">
@@ -13023,7 +12795,7 @@
         </p:nvSpPr>
         <p:spPr>
           <a:xfrm>
-            <a:off x="6172200" y="2560320"/>
+            <a:off x="6172200" y="2880360"/>
             <a:ext cx="5470855" cy="384048"/>
           </a:xfrm>
           <a:prstGeom prst="rect">
@@ -13048,7 +12820,7 @@
                   <a:schemeClr val="tx1"/>
                 </a:solidFill>
               </a:rPr>
-              <a:t>공제된 6,116원이 전부 배민 이익도 아님</a:t>
+              <a:t>빠지는 6,116원에 섞인 것</a:t>
             </a:r>
             <a:endParaRPr lang="en-US" sz="1900" dirty="0"/>
           </a:p>
@@ -13062,8 +12834,8 @@
         </p:nvSpPr>
         <p:spPr>
           <a:xfrm>
-            <a:off x="6172200" y="2990088"/>
-            <a:ext cx="5470855" cy="411480"/>
+            <a:off x="6172200" y="3310128"/>
+            <a:ext cx="5470855" cy="731520"/>
           </a:xfrm>
           <a:prstGeom prst="rect">
             <a:avLst/>
@@ -13077,7 +12849,7 @@
           <a:p>
             <a:pPr indent="0" marL="0">
               <a:lnSpc>
-                <a:spcPct val="110000"/>
+                <a:spcPct val="115000"/>
               </a:lnSpc>
               <a:buNone/>
             </a:pPr>
@@ -13087,7 +12859,7 @@
                   <a:schemeClr val="tx1"/>
                 </a:solidFill>
               </a:rPr>
-              <a:t>부가세 포함, 공개자료로는 플랫폼·라이더 몫 구분 불가</a:t>
+              <a:t>중개이용료, 결제수수료, 배달비, 부가세가 섞여 있어서, 공개자료로는 플랫폼 몫과 라이더 몫을 나눌 수 없음</a:t>
             </a:r>
             <a:endParaRPr lang="en-US" sz="1500" dirty="0"/>
           </a:p>
@@ -13095,108 +12867,7 @@
       </p:sp>
       <p:sp>
         <p:nvSpPr>
-          <p:cNvPr id="27" name="Shape 25"/>
-          <p:cNvSpPr/>
-          <p:nvPr/>
-        </p:nvSpPr>
-        <p:spPr>
-          <a:xfrm>
-            <a:off x="6172200" y="3502152"/>
-            <a:ext cx="5470855" cy="0"/>
-          </a:xfrm>
-          <a:prstGeom prst="line">
-            <a:avLst/>
-          </a:prstGeom>
-          <a:noFill/>
-          <a:ln w="12700">
-            <a:solidFill>
-              <a:schemeClr val="accent6"/>
-            </a:solidFill>
-            <a:prstDash val="solid"/>
-          </a:ln>
-        </p:spPr>
-      </p:sp>
-      <p:sp>
-        <p:nvSpPr>
-          <p:cNvPr id="28" name="Text 26"/>
-          <p:cNvSpPr txBox="1"/>
-          <p:nvPr/>
-        </p:nvSpPr>
-        <p:spPr>
-          <a:xfrm>
-            <a:off x="6172200" y="3657600"/>
-            <a:ext cx="5470855" cy="384048"/>
-          </a:xfrm>
-          <a:prstGeom prst="rect">
-            <a:avLst/>
-          </a:prstGeom>
-          <a:noFill/>
-          <a:ln/>
-        </p:spPr>
-        <p:txBody>
-          <a:bodyPr wrap="square" lIns="0" tIns="0" rIns="0" bIns="0" rtlCol="0" anchor="t"/>
-          <a:lstStyle/>
-          <a:p>
-            <a:pPr indent="0" marL="0">
-              <a:lnSpc>
-                <a:spcPct val="110000"/>
-              </a:lnSpc>
-              <a:buNone/>
-            </a:pPr>
-            <a:r>
-              <a:rPr lang="en-US" sz="1900" b="1" dirty="0">
-                <a:solidFill>
-                  <a:schemeClr val="tx1"/>
-                </a:solidFill>
-              </a:rPr>
-              <a:t>‘수수료 30%’와는 다른 얘기</a:t>
-            </a:r>
-            <a:endParaRPr lang="en-US" sz="1900" dirty="0"/>
-          </a:p>
-        </p:txBody>
-      </p:sp>
-      <p:sp>
-        <p:nvSpPr>
-          <p:cNvPr id="29" name="Text 27"/>
-          <p:cNvSpPr txBox="1"/>
-          <p:nvPr/>
-        </p:nvSpPr>
-        <p:spPr>
-          <a:xfrm>
-            <a:off x="6172200" y="4087368"/>
-            <a:ext cx="5470855" cy="411480"/>
-          </a:xfrm>
-          <a:prstGeom prst="rect">
-            <a:avLst/>
-          </a:prstGeom>
-          <a:noFill/>
-          <a:ln/>
-        </p:spPr>
-        <p:txBody>
-          <a:bodyPr wrap="square" lIns="0" tIns="0" rIns="0" bIns="0" rtlCol="0" anchor="t"/>
-          <a:lstStyle/>
-          <a:p>
-            <a:pPr indent="0" marL="0">
-              <a:lnSpc>
-                <a:spcPct val="110000"/>
-              </a:lnSpc>
-              <a:buNone/>
-            </a:pPr>
-            <a:r>
-              <a:rPr lang="en-US" sz="1500" dirty="0">
-                <a:solidFill>
-                  <a:schemeClr val="tx1"/>
-                </a:solidFill>
-              </a:rPr>
-              <a:t>중개이용료·결제수수료·배달비·부가세를 다 합친 비율</a:t>
-            </a:r>
-            <a:endParaRPr lang="en-US" sz="1500" dirty="0"/>
-          </a:p>
-        </p:txBody>
-      </p:sp>
-      <p:sp>
-        <p:nvSpPr>
-          <p:cNvPr id="30" name="Text 28"/>
+          <p:cNvPr id="27" name="Text 25"/>
           <p:cNvSpPr txBox="1"/>
           <p:nvPr/>
         </p:nvSpPr>
@@ -13269,7 +12940,7 @@
       </p:sp>
       <p:sp>
         <p:nvSpPr>
-          <p:cNvPr id="31" name="Text 29"/>
+          <p:cNvPr id="28" name="Text 26"/>
           <p:cNvSpPr txBox="1"/>
           <p:nvPr/>
         </p:nvSpPr>
@@ -13490,7 +13161,7 @@
                   <a:schemeClr val="tx1"/>
                 </a:solidFill>
               </a:rPr>
-              <a:t>요기요를 운영하던 딜리버리히어로가 배민 운영사 우아한형제들을 인수하려 함</a:t>
+              <a:t>딜리버리히어로(요기요 운영사의 모회사)가 배민 운영사 우아한형제들 인수를 추진</a:t>
             </a:r>
             <a:endParaRPr lang="en-US" sz="1600" dirty="0"/>
           </a:p>
@@ -13857,7 +13528,7 @@
                   <a:schemeClr val="tx1"/>
                 </a:solidFill>
               </a:rPr>
-              <a:t>딜리버리히어로, 요기요 운영사(DH Korea) 지분 100% 매각 완료 발표</a:t>
+              <a:t>딜리버리히어로, 요기요 운영사 지분 100% 매각 완료 발표</a:t>
             </a:r>
             <a:endParaRPr lang="en-US" sz="1400" dirty="0"/>
           </a:p>
@@ -13930,7 +13601,7 @@
                   <a:schemeClr val="tx1"/>
                 </a:solidFill>
               </a:rPr>
-              <a:t>합병 단계에서 경쟁이 줄어드는 것을 미리 막은 사례 (이미 벌어진 독점 남용을 처벌한 건 아님)</a:t>
+              <a:t>결합 전 심사에서 요기요 매각을 조건으로 붙인 사례</a:t>
             </a:r>
             <a:endParaRPr lang="en-US" sz="1700" dirty="0"/>
           </a:p>
@@ -13969,7 +13640,7 @@
                   <a:schemeClr val="accent5"/>
                 </a:solidFill>
               </a:rPr>
-              <a:t>출처: 공정거래위원회 보도자료(2020.12.28.), Delivery Hero 발표(2021.10.29.)</a:t>
+              <a:t>출처: 공정거래위원회 보도자료(2020.12.28.), 딜리버리히어로 발표(2021.10.29.)</a:t>
             </a:r>
             <a:endParaRPr lang="en-US" sz="1000" dirty="0"/>
           </a:p>
@@ -14159,7 +13830,7 @@
                   <a:schemeClr val="tx1"/>
                 </a:solidFill>
               </a:rPr>
-              <a:t>쿠팡이 직접 사서 파는 상품·자체브랜드(PB) 상품과 입점 판매자 상품이 같은 검색 결과에서 경쟁</a:t>
+              <a:t>쿠팡이 직접 사서 파는 상품·자체브랜드 상품과 입점 판매자 상품이 같은 검색 결과에서 경쟁</a:t>
             </a:r>
             <a:endParaRPr lang="en-US" sz="1600" dirty="0"/>
           </a:p>
@@ -14423,7 +14094,24 @@
                   <a:schemeClr val="tx1"/>
                 </a:solidFill>
               </a:rPr>
-              <a:t>공정위 의결(제2024-284호): 부당한 고객유인행위로 시정명령, 과징금 1,628억 2,400만 원</a:t>
+              <a:t>공정위 의결: 부당한 고객유인행위로</a:t>
+            </a:r>
+            <a:endParaRPr lang="en-US" sz="1400" dirty="0"/>
+          </a:p>
+          <a:p>
+            <a:pPr indent="0" marL="0">
+              <a:lnSpc>
+                <a:spcPct val="112000"/>
+              </a:lnSpc>
+              <a:buNone/>
+            </a:pPr>
+            <a:r>
+              <a:rPr lang="en-US" sz="1400" dirty="0">
+                <a:solidFill>
+                  <a:schemeClr val="tx1"/>
+                </a:solidFill>
+              </a:rPr>
+              <a:t>시정명령, 과징금 1,628억 2,400만 원</a:t>
             </a:r>
             <a:endParaRPr lang="en-US" sz="1400" dirty="0"/>
           </a:p>
@@ -14487,7 +14175,7 @@
                   <a:schemeClr val="tx1"/>
                 </a:solidFill>
               </a:rPr>
-              <a:t>2026년 2분기 공시</a:t>
+              <a:t>2026년 2분기</a:t>
             </a:r>
             <a:endParaRPr lang="en-US" sz="1500" dirty="0"/>
           </a:p>
@@ -14526,24 +14214,7 @@
                   <a:schemeClr val="tx1"/>
                 </a:solidFill>
               </a:rPr>
-              <a:t>쿠팡 SEC 보고서(Form 10-Q): 행정소송 진행 중</a:t>
-            </a:r>
-            <a:endParaRPr lang="en-US" sz="1400" dirty="0"/>
-          </a:p>
-          <a:p>
-            <a:pPr indent="0" marL="0">
-              <a:lnSpc>
-                <a:spcPct val="112000"/>
-              </a:lnSpc>
-              <a:buNone/>
-            </a:pPr>
-            <a:r>
-              <a:rPr lang="en-US" sz="1400" dirty="0">
-                <a:solidFill>
-                  <a:schemeClr val="tx1"/>
-                </a:solidFill>
-              </a:rPr>
-              <a:t>2026년 9월 심리 예정</a:t>
+              <a:t>쿠팡 공시: 공정위를 상대로 한 행정소송 진행 중</a:t>
             </a:r>
             <a:endParaRPr lang="en-US" sz="1400" dirty="0"/>
           </a:p>
@@ -14616,7 +14287,7 @@
                   <a:schemeClr val="tx1"/>
                 </a:solidFill>
               </a:rPr>
-              <a:t>공정위는 제재했고 쿠팡은 불복해 소송 중 (2026년 2분기 공시 기준, 이후 결과는 확인 못 함)</a:t>
+              <a:t>공정위는 제재했고, 쿠팡은 불복해 소송 중 (2026년 2분기 공시 기준)</a:t>
             </a:r>
             <a:endParaRPr lang="en-US" sz="1700" dirty="0"/>
           </a:p>
@@ -14655,7 +14326,7 @@
                   <a:schemeClr val="accent5"/>
                 </a:solidFill>
               </a:rPr>
-              <a:t>출처: 공정위 의결 제2024-284호, Coupang 2026년 2분기 Form 10-Q(SEC 공시)  |  2026.10.1. 확인</a:t>
+              <a:t>출처: 공정거래위원회 의결(2024), 쿠팡 2026년 2분기 미국 공시</a:t>
             </a:r>
             <a:endParaRPr lang="en-US" sz="1000" dirty="0"/>
           </a:p>
@@ -14715,9 +14386,9 @@
 </file>
 
 <file path=ppt/theme/theme1.xml><?xml version="1.0" encoding="utf-8"?>
-<a:theme xmlns:a="http://schemas.openxmlformats.org/drawingml/2006/main" name="Platform Talk">
+<a:theme xmlns:a="http://schemas.openxmlformats.org/drawingml/2006/main" name="플랫폼 발표">
   <a:themeElements>
-    <a:clrScheme name="Platform Talk">
+    <a:clrScheme name="플랫폼 발표">
       <a:dk1>
         <a:srgbClr val="222222"/>
       </a:dk1>
@@ -14755,7 +14426,7 @@
         <a:srgbClr val="954F72"/>
       </a:folHlink>
     </a:clrScheme>
-    <a:fontScheme name="Platform Talk">
+    <a:fontScheme name="플랫폼 발표">
       <a:majorFont>
         <a:latin typeface="맑은 고딕"/>
         <a:ea typeface="맑은 고딕"/>
